--- a/it/slides/02-Architettura_dei_Calcolatori-Primo_Contatto_con_Assembly_RISC-V-Codice.pptx
+++ b/it/slides/02-Architettura_dei_Calcolatori-Primo_Contatto_con_Assembly_RISC-V-Codice.pptx
@@ -122,13 +122,13 @@
   <p:extLst>
     <p:ext uri="{521415D9-36F7-43E2-AB2F-B90AF26B5E84}">
       <p14:sectionLst xmlns:p14="http://schemas.microsoft.com/office/powerpoint/2010/main">
-        <p14:section name="Apertura" id="{c7851db5-cc30-46c9-5b52-9e179c22f09d}">
+        <p14:section name="Apertura" id="{d5345181-a889-797a-738d-107c0df36ca7}">
           <p14:sldIdLst>
             <p14:sldId id="256"/>
             <p14:sldId id="257"/>
           </p14:sldIdLst>
         </p14:section>
-        <p14:section name="I listati" id="{a64f4459-0103-4c34-ed68-fc89822f7b5f}">
+        <p14:section name="La prima cartuccia" id="{a7bc4049-eb92-585c-95d4-13b43c0dac80}">
           <p14:sldIdLst>
             <p14:sldId id="258"/>
             <p14:sldId id="259"/>
@@ -137,14 +137,14 @@
             <p14:sldId id="262"/>
           </p14:sldIdLst>
         </p14:section>
-        <p14:section name="Il programma completo" id="{d5759bb5-4c39-9887-c592-8fcc242d803b}">
+        <p14:section name="Il programma completo" id="{d47412f9-578b-0d40-dc6a-8a0ec21eba5b}">
           <p14:sldIdLst>
             <p14:sldId id="263"/>
             <p14:sldId id="264"/>
             <p14:sldId id="265"/>
           </p14:sldIdLst>
         </p14:section>
-        <p14:section name="Eseguire e provare" id="{5b01c957-7d0c-09bc-b737-68c6067e99d2}">
+        <p14:section name="Eseguire e provare" id="{fbaf653c-7d9f-3ab5-ffdb-fdd21ab54d5b}">
           <p14:sldIdLst>
             <p14:sldId id="266"/>
             <p14:sldId id="267"/>
@@ -153,7 +153,7 @@
             <p14:sldId id="270"/>
           </p14:sldIdLst>
         </p14:section>
-        <p14:section name="Esercizi" id="{41f0dd74-0a05-f1f2-39b4-66862419ec61}">
+        <p14:section name="Esercizi" id="{4c66db82-20b5-6665-cf3e-dae3f0d61218}">
           <p14:sldIdLst>
             <p14:sldId id="271"/>
           </p14:sldIdLst>
@@ -2751,7 +2751,7 @@
                 <a:ea typeface="Cambria" pitchFamily="34" charset="-122"/>
                 <a:cs typeface="Cambria" pitchFamily="34" charset="-120"/>
               </a:rPr>
-              <a:t>Primo contatto: l'assembly RISC-V su PRG32: il codice</a:t>
+              <a:t>Primo contatto: l'assembly RISC‑V su PRG32: il codice</a:t>
             </a:r>
             <a:endParaRPr lang="en-US" sz="4800" dirty="0"/>
           </a:p>
@@ -2871,7 +2871,63 @@
       </p:sp>
       <p:sp>
         <p:nvSpPr>
-          <p:cNvPr id="11" name="Shape 9"/>
+          <p:cNvPr id="11" name="Text 9"/>
+          <p:cNvSpPr txBox="1"/>
+          <p:nvPr/>
+        </p:nvSpPr>
+        <p:spPr>
+          <a:xfrm>
+            <a:off x="4693615" y="566928"/>
+            <a:ext cx="6949440" cy="640080"/>
+          </a:xfrm>
+          <a:prstGeom prst="rect">
+            <a:avLst/>
+          </a:prstGeom>
+          <a:noFill/>
+          <a:ln/>
+        </p:spPr>
+        <p:txBody>
+          <a:bodyPr wrap="square" lIns="0" tIns="0" rIns="0" bIns="0" rtlCol="0" anchor="t"/>
+          <a:lstStyle/>
+          <a:p>
+            <a:pPr algn="r" indent="0" marL="0">
+              <a:buNone/>
+            </a:pPr>
+            <a:r>
+              <a:rPr lang="en-US" sz="1300" dirty="0">
+                <a:solidFill>
+                  <a:srgbClr val="CFE3EA"/>
+                </a:solidFill>
+                <a:latin typeface="Calibri" pitchFamily="34" charset="0"/>
+                <a:ea typeface="Calibri" pitchFamily="34" charset="-122"/>
+                <a:cs typeface="Calibri" pitchFamily="34" charset="-120"/>
+              </a:rPr>
+              <a:t>Presentazione del codice. I concetti, le figure e le domande sono nella presentazione della lezione:</a:t>
+            </a:r>
+            <a:endParaRPr lang="en-US" sz="1300" dirty="0"/>
+          </a:p>
+          <a:p>
+            <a:pPr algn="r" indent="0" marL="0">
+              <a:buNone/>
+            </a:pPr>
+            <a:r>
+              <a:rPr lang="en-US" sz="1300" dirty="0">
+                <a:solidFill>
+                  <a:srgbClr val="CFE3EA"/>
+                </a:solidFill>
+                <a:latin typeface="Calibri" pitchFamily="34" charset="0"/>
+                <a:ea typeface="Calibri" pitchFamily="34" charset="-122"/>
+                <a:cs typeface="Calibri" pitchFamily="34" charset="-120"/>
+              </a:rPr>
+              <a:t>02-Architettura_dei_Calcolatori-Primo_Contatto_con_Assembly_RISC-V.pptx</a:t>
+            </a:r>
+            <a:endParaRPr lang="en-US" sz="1300" dirty="0"/>
+          </a:p>
+        </p:txBody>
+      </p:sp>
+      <p:sp>
+        <p:nvSpPr>
+          <p:cNvPr id="12" name="Shape 10"/>
           <p:cNvSpPr/>
           <p:nvPr/>
         </p:nvSpPr>
@@ -2898,7 +2954,7 @@
       </p:sp>
       <p:pic>
         <p:nvPicPr>
-          <p:cNvPr id="12" name="Image 0" descr="/Users/raffaelemontella/devel/riscv-prg32/computer-architecture-with-prg32/tools/assets/lab1_step4_bar.png">    </p:cNvPr>
+          <p:cNvPr id="13" name="Image 0" descr="/Users/raffaelemontella/devel/riscv-prg32/computer-architecture-with-prg32/tools/assets/lab1_step4_bar.png">    </p:cNvPr>
           <p:cNvPicPr>
             <a:picLocks noChangeAspect="1"/>
           </p:cNvPicPr>

--- a/it/slides/02-Architettura_dei_Calcolatori-Primo_Contatto_con_Assembly_RISC-V-Codice.pptx
+++ b/it/slides/02-Architettura_dei_Calcolatori-Primo_Contatto_con_Assembly_RISC-V-Codice.pptx
@@ -122,13 +122,13 @@
   <p:extLst>
     <p:ext uri="{521415D9-36F7-43E2-AB2F-B90AF26B5E84}">
       <p14:sectionLst xmlns:p14="http://schemas.microsoft.com/office/powerpoint/2010/main">
-        <p14:section name="Apertura" id="{d5345181-a889-797a-738d-107c0df36ca7}">
+        <p14:section name="Apertura" id="{05a629b6-7339-85e6-7cb3-7b200b57ecdb}">
           <p14:sldIdLst>
             <p14:sldId id="256"/>
             <p14:sldId id="257"/>
           </p14:sldIdLst>
         </p14:section>
-        <p14:section name="La prima cartuccia" id="{a7bc4049-eb92-585c-95d4-13b43c0dac80}">
+        <p14:section name="La prima cartuccia" id="{42a2d9e4-e0e8-91f9-1dbf-de7c2efc43dd}">
           <p14:sldIdLst>
             <p14:sldId id="258"/>
             <p14:sldId id="259"/>
@@ -137,14 +137,14 @@
             <p14:sldId id="262"/>
           </p14:sldIdLst>
         </p14:section>
-        <p14:section name="Il programma completo" id="{d47412f9-578b-0d40-dc6a-8a0ec21eba5b}">
+        <p14:section name="Il programma completo" id="{d1d6af84-6516-1460-9259-88a3e8af5f11}">
           <p14:sldIdLst>
             <p14:sldId id="263"/>
             <p14:sldId id="264"/>
             <p14:sldId id="265"/>
           </p14:sldIdLst>
         </p14:section>
-        <p14:section name="Eseguire e provare" id="{fbaf653c-7d9f-3ab5-ffdb-fdd21ab54d5b}">
+        <p14:section name="Eseguire e provare" id="{ddfc94a0-259b-885d-ad52-7efbeccd3342}">
           <p14:sldIdLst>
             <p14:sldId id="266"/>
             <p14:sldId id="267"/>
@@ -153,7 +153,7 @@
             <p14:sldId id="270"/>
           </p14:sldIdLst>
         </p14:section>
-        <p14:section name="Esercizi" id="{4c66db82-20b5-6665-cf3e-dae3f0d61218}">
+        <p14:section name="Esercizi" id="{ef0e9a5d-bf93-7c1e-2f4c-90ab24f3dadf}">
           <p14:sldIdLst>
             <p14:sldId id="271"/>
           </p14:sldIdLst>
@@ -562,7 +562,9 @@
           <a:p>
             <a:r>
               <a:rPr lang="en-US" dirty="0"/>
-              <a:t>Questa è la presentazione del codice della Lezione 02. La presentazione della lezione contiene i concetti; questa contiene tutto ciò che si scrive e si esegue: i listati con la loro spiegazione, il programma completo, che cosa mostra, e il modo di provarlo su ciascuno dei tre host.</a:t>
+              <a:t>Questa è la presentazione del codice della Lezione 02. La presentazione della lezione contiene i concetti; questa contiene tutto ciò che si scrive e si esegue: i listati con la loro spiegazione, il programma completo, che cosa mostra, e il modo di provarlo su ciascuno dei tre host.
+Stato di apprendimento: DA COMPRENDERE OGGI, alla fine di questa lezione lo spiegate, lo seguite passo passo e lo applicate da soli; DA UTILIZZARE OGGI, oggi seguite e usate la ricetta; come funziona dentro si spiega più avanti, o non fa parte del corso; DA COMPRENDERE PIÙ AVANTI, riconoscete il nome e lo scopo; lo spiega una lezione successiva. Una slide senza etichetta è contesto: una storia, un esempio, una domanda, un esercizio.
+Stato di apprendimento di questa lezione. DA COMPRENDERE OGGI: registri, calcolo, trasferimento, salto; i registri; contratto init/update/draw; gli argomenti in a0 ... a7; perché si salva ra; indirizzo, valore, load, store; le istruzioni di base; le pseudo-istruzioni; un'istruzione è un numero; seguire a mano l'esecuzione. DA UTILIZZARE OGGI: la convenzione di chiamata (Lezione 18); le maschere di bit (Lezione 08) e, usati senza essere studiati nel corso, le direttive dell'assemblatore, gli strumenti di PRG32, le chiamate del runtime PRG32, il debugger di PRG32-QT, il programma completo. DA COMPRENDERE PIÙ AVANTI: la pila (Lezione 18); i modi di indirizzamento (Lezione 19); formati delle istruzioni (Lezione 19); l'esadecimale (Lezione 04); il complemento a due (Lezione 05); la virgola fissa (Lezione 06); l'algebra di Boole (Lezione 08); il sommatore (Lezione 09); dai volt ai bit (Lezione 10); latch e flip-flop (Lezione 13); il ciclo del processore (Lezione 19); il progetto Verm1 (Lezione 07). Una slide senza etichetta è contesto: una storia, un esempio, una domanda, un esercizio.</a:t>
             </a:r>
             <a:endParaRPr lang="en-US" dirty="0"/>
           </a:p>
@@ -651,6 +653,7 @@
             <a:r>
               <a:rPr lang="en-US" dirty="0"/>
               <a:t>Una pagina del programma completo, esattamente com'è nel repository. Leggetelo dall'inizio: l'intestazione dice che cosa mostra il programma e come compilarlo; seguono le tre funzioni init, update e draw, poi i dati. Le righe incontrate nei listati della lezione hanno qui gli stessi commenti.
+DA UTILIZZARE OGGI: il programma completo (si usa, non si studia, in questo corso).
 Per il docente: code/l02.S, come viene compilato ed eseguito dai test. I commenti fanno parte del programma, e sono in inglese come in tutti i listati: leggeteli con il codice.</a:t>
             </a:r>
             <a:endParaRPr lang="en-US" dirty="0"/>
@@ -829,6 +832,7 @@
             <a:r>
               <a:rPr lang="en-US" dirty="0"/>
               <a:t>La via più rapida: PRG32-QT sul vostro computer. Quattro passi, ciascuno con il suo comando. PRG32-QT si comporta come una scheda sulla porta 8080, ed è per questo che il comando di caricamento dice esp32c6. Con la modalità debug abilitata potete fermarvi su qualsiasi istruzione e leggere registri e memoria.
+DA UTILIZZARE OGGI: gli strumenti di PRG32 (si usa, non si studia, in questo corso).
 Per il docente: Eseguito dai test: la cartuccia di questa slide è compilata con questo comando ed eseguita sull'esecutore senza interfaccia di PRG32-QT. Senza la toolchain: importate il file .prg32 in PRG32-QT e scegliete Run Cartridge. Tasti: frecce o WASD per il joystick, Z o J per A, X o K per B, Invio per Start, Esc per tornare a Setup.</a:t>
             </a:r>
             <a:endParaRPr lang="en-US" dirty="0"/>
@@ -918,6 +922,7 @@
             <a:r>
               <a:rPr lang="en-US" dirty="0"/>
               <a:t>Lo stesso programma sull'emulatore. QEMU esegue il firmware vero su un chip emulato, quindi la cartuccia va compilata per l'architettura qemu. Caricate la cartuccia mentre QEMU è chiuso. Il firmware si apre sul menu Setup: scegliete Run Cartridge e lo slot. Ricordate che la tastiera è letta dal terminale, non dalla finestra con l'immagine.
+DA UTILIZZARE OGGI: gli strumenti di PRG32 (si usa, non si studia, in questo corso).
 Per il docente: Verificato dai test fino al caricamento: la cartuccia è compilata per l'architettura qemu e accettata nell'immagine flash dell'emulatore. Ciò che l'emulatore poi mostra non è verificato automaticamente: il QEMU di Espressif ha bisogno della sua finestra. Dall'ottobre 2026 il firmware parte da Setup: scegliete Run Cartridge, poi cart0.</a:t>
             </a:r>
             <a:endParaRPr lang="en-US" dirty="0"/>
@@ -1007,6 +1012,7 @@
             <a:r>
               <a:rPr lang="en-US" dirty="0"/>
               <a:t>Lo stesso programma sul kit. Il firmware si scrive una volta, via USB; dopo, le cartucce viaggiano sul Wi-Fi. Il comando di caricamento è quello usato per PRG32-QT con l'indirizzo della scheda. È l'unico host che i test automatici non eseguono: provatelo, e riferite ciò che vedete.
+DA UTILIZZARE OGGI: gli strumenti di PRG32 (si usa, non si studia, in questo corso).
 Per il docente: Non eseguito dai test: sulla macchina di prova non c'è una scheda. La cartuccia per l'architettura esp32c6 è compilata dai test; i passi sono quelli della documentazione di PRG32. Se la porta seriale non viene trovata, passatela esplicitamente. Per usare il Wi-Fi dell'aula: python3 -m prg32 wifi set --ssid NOME --password PASSWORD --mode sta.</a:t>
             </a:r>
             <a:endParaRPr lang="en-US" dirty="0"/>
@@ -1096,6 +1102,7 @@
             <a:r>
               <a:rPr lang="en-US" dirty="0"/>
               <a:t>I cinque sintomi più comuni, che cosa significa ciascuno, e che cosa fare. Leggete il messaggio prima di cambiare qualcosa: quasi sempre nomina la causa.
+DA UTILIZZARE OGGI: gli strumenti di PRG32 (si usa, non si studia, in questo corso).
 Per il docente: Le prime tre righe coprono la maggior parte dei casi. Quando chiedete aiuto, incollate il comando e l'intero messaggio come testo. docs/usage/troubleshooting.md del repository di PRG32 ha l'elenco completo.</a:t>
             </a:r>
             <a:endParaRPr lang="en-US" dirty="0"/>
@@ -1363,6 +1370,7 @@
             <a:r>
               <a:rPr lang="en-US" dirty="0"/>
               <a:t>Il più piccolo programma che gira. .option norelax è una riga con cui comincia ogni esempio PRG32: rende prevedibile la disposizione della cartuccia. .section .text dice che segue del codice. Ogni .global rende un'etichetta visibile fuori dal file, così il firmware può trovare la funzione per nome. Poi tre funzioni, ciascuna fatta della sola istruzione ret, che ritorna al chiamante. Il risultato è uno schermo nero, ed è un successo: il framework ha trovato le vostre tre funzioni, le ha chiamate, e ha riavuto il controllo.
+DA UTILIZZARE OGGI: le direttive dell'assemblatore (si usa, non si studia, in questo corso).
 Per il docente: Sorgente: labs/05-asm-first-contact/step1_skeleton.S. Risultato atteso: uno schermo nero. Il risultato è che il framework ha trovato le tre funzioni, le ha chiamate, ed è sopravvissuto.</a:t>
             </a:r>
             <a:endParaRPr lang="en-US" dirty="0"/>
@@ -1452,6 +1460,7 @@
             <a:r>
               <a:rPr lang="en-US" dirty="0"/>
               <a:t>Due comandi che batterete centinaia di volte. cartridge build trasforma il file assembly in una cartuccia: --entry-prefix first è il prefisso delle vostre tre funzioni, --out il nome del risultato. Poi la si esegue: in QEMU con qemu upload e qemu run, oppure su una scheda o su PRG32-QT con upload-and-run e l'indirizzo dell'host. Per PRG32-QT sul vostro portatile l'indirizzo è http://localhost:8080. Il file della cartuccia è lo stesso per tutti e tre.
+DA UTILIZZARE OGGI: gli strumenti di PRG32 (si usa, non si studia, in questo corso).
 Per il docente: Sorgente: labs/run.sh. Con PRG32_HOME impostata, l'intera sequenza è: labs/run.sh 05-asm-first-contact/step1_skeleton.S first . Il file della cartuccia è identico byte per byte per QEMU, per la scheda e per PRG32-QT.</a:t>
             </a:r>
             <a:endParaRPr lang="en-US" dirty="0"/>
@@ -1541,6 +1550,7 @@
             <a:r>
               <a:rPr lang="en-US" dirty="0"/>
               <a:t>Il secondo passo scrive sullo schermo. Leggete first_draw in tre parti. Le prime due righe fanno spazio sullo stack e salvano ra. Poi due chiamate: prg32_gfx_clear con il colore in a0, e prg32_gfx_text8 con cinque argomenti da a0 ad a4: x, y, l'indirizzo della stringa, colore del testo, colore dello sfondo. Notate i due modi di caricare: li carica un numero, la carica l'indirizzo di un'etichetta. Le ultime tre righe ripristinano ra, rilasciano lo stack e ritornano. La stringa è un dato, nella sezione .rodata.
+DA COMPRENDERE OGGI: gli argomenti in a0 ... a7. DA UTILIZZARE OGGI: le chiamate del runtime PRG32 (si usa, non si studia, in questo corso).
 Per il docente: Sorgente: labs/05-asm-first-contact/step2_hello.S. Le righe .equ (BLACK 0x0000, WHITE 0xffff) sono omesse sulla slide.</a:t>
             </a:r>
             <a:endParaRPr lang="en-US" dirty="0"/>
@@ -1630,6 +1640,7 @@
             <a:r>
               <a:rPr lang="en-US" dirty="0"/>
               <a:t>Il terzo passo conserva un valore da un frame al successivo. I registri non sopravvivono tra una chiamata di update e l'altra, quindi il valore deve vivere in memoria. counter è un'etichetta: dà un nome a una locazione della sezione .data che contiene una parola. Le quattro istruzioni sono lo schema di ogni variabile: la mette in t0 l'indirizzo della locazione; lw carica in t1 il valore; addi lo modifica; sw lo riscrive. Load, modify, store. Sullo schermo non cambia ancora nulla: il contatore avanza, ma nessuno lo disegna.
+DA COMPRENDERE OGGI: indirizzo, valore, load, store.
 Per il docente: Sorgente: labs/05-asm-first-contact/step3_counter.S. Non cambia ancora nulla di visibile: il contatore avanza ma nessuno lo disegna. Chiedere all'aula come si potrebbe dimostrare che avanza (risposta: il debugger di PRG32-QT, oppure il passo successivo).</a:t>
             </a:r>
             <a:endParaRPr lang="en-US" dirty="0"/>
@@ -1719,6 +1730,7 @@
             <a:r>
               <a:rPr lang="en-US" dirty="0"/>
               <a:t>Il quarto passo rende visibile il contatore come una barra verde. Il valore viene caricato, e andi a2, t1, 255 ne conserva solo gli otto bit bassi, così la larghezza va da 0 a 255 e poi ricomincia. Gli altri registri sono gli argomenti di prg32_gfx_rect: x, y, larghezza, altezza e colore. Otto righe, e vi si nascondono tre lezioni future: 255 scritto come 0xFF, andi usato come maschera, e 0x07e0 che significa verde. Ricordate dove li avete visti per la prima volta.
+DA UTILIZZARE OGGI: le maschere di bit (si studia nella Lezione 08).
 Per il docente: Sorgente: labs/05-asm-first-contact/step4_bar.S (le righe aggiunte a first_draw). In queste otto righe si nascondono tre lezioni future: 255 = 0xFF (notazione posizionale), andi come maschera di bit (algebra di Boole), 0x07e0 come colore (codifica dell'informazione).</a:t>
             </a:r>
             <a:endParaRPr lang="en-US" dirty="0"/>
@@ -1808,6 +1820,7 @@
             <a:r>
               <a:rPr lang="en-US" dirty="0"/>
               <a:t>Una pagina del programma completo, esattamente com'è nel repository. Leggetelo dall'inizio: l'intestazione dice che cosa mostra il programma e come compilarlo; seguono le tre funzioni init, update e draw, poi i dati. Le righe incontrate nei listati della lezione hanno qui gli stessi commenti.
+DA UTILIZZARE OGGI: il programma completo (si usa, non si studia, in questo corso).
 Per il docente: code/l02.S, come viene compilato ed eseguito dai test. I commenti fanno parte del programma, e sono in inglese come in tutti i listati: leggeteli con il codice.</a:t>
             </a:r>
             <a:endParaRPr lang="en-US" dirty="0"/>
@@ -1897,6 +1910,7 @@
             <a:r>
               <a:rPr lang="en-US" dirty="0"/>
               <a:t>Una pagina del programma completo, esattamente com'è nel repository. Leggetelo dall'inizio: l'intestazione dice che cosa mostra il programma e come compilarlo; seguono le tre funzioni init, update e draw, poi i dati. Le righe incontrate nei listati della lezione hanno qui gli stessi commenti.
+DA UTILIZZARE OGGI: il programma completo (si usa, non si studia, in questo corso).
 Per il docente: code/l02.S, come viene compilato ed eseguito dai test. I commenti fanno parte del programma, e sono in inglese come in tutti i listati: leggeteli con il codice.</a:t>
             </a:r>
             <a:endParaRPr lang="en-US" dirty="0"/>
@@ -2978,6 +2992,420 @@
       </p:pic>
       <p:sp>
         <p:nvSpPr>
+          <p:cNvPr id="14" name="Shape 11"/>
+          <p:cNvSpPr/>
+          <p:nvPr/>
+        </p:nvSpPr>
+        <p:spPr>
+          <a:xfrm>
+            <a:off x="8910777" y="91440"/>
+            <a:ext cx="2732278" cy="274320"/>
+          </a:xfrm>
+          <a:prstGeom prst="rect">
+            <a:avLst/>
+          </a:prstGeom>
+          <a:solidFill>
+            <a:srgbClr val="F3E8FF"/>
+          </a:solidFill>
+          <a:ln w="12700">
+            <a:solidFill>
+              <a:srgbClr val="7E22CE"/>
+            </a:solidFill>
+            <a:prstDash val="dash"/>
+          </a:ln>
+        </p:spPr>
+      </p:sp>
+      <p:sp>
+        <p:nvSpPr>
+          <p:cNvPr id="15" name="Shape 12"/>
+          <p:cNvSpPr/>
+          <p:nvPr/>
+        </p:nvSpPr>
+        <p:spPr>
+          <a:xfrm>
+            <a:off x="8938209" y="128016"/>
+            <a:ext cx="45720" cy="45720"/>
+          </a:xfrm>
+          <a:prstGeom prst="rect">
+            <a:avLst/>
+          </a:prstGeom>
+          <a:solidFill>
+            <a:srgbClr val="7E22CE"/>
+          </a:solidFill>
+          <a:ln w="12700">
+            <a:solidFill>
+              <a:srgbClr val="7E22CE"/>
+            </a:solidFill>
+            <a:prstDash val="solid"/>
+          </a:ln>
+        </p:spPr>
+      </p:sp>
+      <p:sp>
+        <p:nvSpPr>
+          <p:cNvPr id="16" name="Shape 13"/>
+          <p:cNvSpPr/>
+          <p:nvPr/>
+        </p:nvSpPr>
+        <p:spPr>
+          <a:xfrm>
+            <a:off x="8938209" y="205740"/>
+            <a:ext cx="45720" cy="45720"/>
+          </a:xfrm>
+          <a:prstGeom prst="rect">
+            <a:avLst/>
+          </a:prstGeom>
+          <a:solidFill>
+            <a:srgbClr val="7E22CE"/>
+          </a:solidFill>
+          <a:ln w="12700">
+            <a:solidFill>
+              <a:srgbClr val="7E22CE"/>
+            </a:solidFill>
+            <a:prstDash val="solid"/>
+          </a:ln>
+        </p:spPr>
+      </p:sp>
+      <p:sp>
+        <p:nvSpPr>
+          <p:cNvPr id="17" name="Shape 14"/>
+          <p:cNvSpPr/>
+          <p:nvPr/>
+        </p:nvSpPr>
+        <p:spPr>
+          <a:xfrm>
+            <a:off x="8938209" y="283464"/>
+            <a:ext cx="45720" cy="45720"/>
+          </a:xfrm>
+          <a:prstGeom prst="rect">
+            <a:avLst/>
+          </a:prstGeom>
+          <a:solidFill>
+            <a:srgbClr val="7E22CE"/>
+          </a:solidFill>
+          <a:ln w="12700">
+            <a:solidFill>
+              <a:srgbClr val="7E22CE"/>
+            </a:solidFill>
+            <a:prstDash val="solid"/>
+          </a:ln>
+        </p:spPr>
+      </p:sp>
+      <p:pic>
+        <p:nvPicPr>
+          <p:cNvPr id="18" name="Image 1" descr="preencoded.png">    </p:cNvPr>
+          <p:cNvPicPr>
+            <a:picLocks noChangeAspect="1"/>
+          </p:cNvPicPr>
+          <p:nvPr/>
+        </p:nvPicPr>
+        <p:blipFill>
+          <a:blip r:embed="rId2"/>
+          <a:stretch>
+            <a:fillRect/>
+          </a:stretch>
+        </p:blipFill>
+        <p:spPr>
+          <a:xfrm>
+            <a:off x="9038793" y="128016"/>
+            <a:ext cx="201168" cy="201168"/>
+          </a:xfrm>
+          <a:prstGeom prst="rect">
+            <a:avLst/>
+          </a:prstGeom>
+        </p:spPr>
+      </p:pic>
+      <p:sp>
+        <p:nvSpPr>
+          <p:cNvPr id="19" name="Text 15"/>
+          <p:cNvSpPr txBox="1"/>
+          <p:nvPr/>
+        </p:nvSpPr>
+        <p:spPr>
+          <a:xfrm>
+            <a:off x="9294825" y="91440"/>
+            <a:ext cx="2311654" cy="274320"/>
+          </a:xfrm>
+          <a:prstGeom prst="rect">
+            <a:avLst/>
+          </a:prstGeom>
+          <a:noFill/>
+          <a:ln/>
+        </p:spPr>
+        <p:txBody>
+          <a:bodyPr wrap="square" lIns="0" tIns="0" rIns="0" bIns="0" rtlCol="0" anchor="ctr"/>
+          <a:lstStyle/>
+          <a:p>
+            <a:pPr indent="0" marL="0">
+              <a:buNone/>
+            </a:pPr>
+            <a:r>
+              <a:rPr lang="en-US" sz="1100" b="1" dirty="0">
+                <a:solidFill>
+                  <a:srgbClr val="6B21A8"/>
+                </a:solidFill>
+                <a:latin typeface="Calibri" pitchFamily="34" charset="0"/>
+                <a:ea typeface="Calibri" pitchFamily="34" charset="-122"/>
+                <a:cs typeface="Calibri" pitchFamily="34" charset="-120"/>
+              </a:rPr>
+              <a:t>DA COMPRENDERE PIÙ AVANTI</a:t>
+            </a:r>
+            <a:endParaRPr lang="en-US" sz="1100" dirty="0"/>
+          </a:p>
+        </p:txBody>
+      </p:sp>
+      <p:sp>
+        <p:nvSpPr>
+          <p:cNvPr id="20" name="Shape 16"/>
+          <p:cNvSpPr/>
+          <p:nvPr/>
+        </p:nvSpPr>
+        <p:spPr>
+          <a:xfrm>
+            <a:off x="6675069" y="91440"/>
+            <a:ext cx="2125980" cy="274320"/>
+          </a:xfrm>
+          <a:prstGeom prst="rect">
+            <a:avLst/>
+          </a:prstGeom>
+          <a:solidFill>
+            <a:srgbClr val="FEF3C7"/>
+          </a:solidFill>
+          <a:ln w="12700">
+            <a:solidFill>
+              <a:srgbClr val="B45309"/>
+            </a:solidFill>
+            <a:prstDash val="solid"/>
+          </a:ln>
+        </p:spPr>
+      </p:sp>
+      <p:sp>
+        <p:nvSpPr>
+          <p:cNvPr id="21" name="Shape 17"/>
+          <p:cNvSpPr/>
+          <p:nvPr/>
+        </p:nvSpPr>
+        <p:spPr>
+          <a:xfrm>
+            <a:off x="6675069" y="91440"/>
+            <a:ext cx="27432" cy="274320"/>
+          </a:xfrm>
+          <a:prstGeom prst="rect">
+            <a:avLst/>
+          </a:prstGeom>
+          <a:solidFill>
+            <a:srgbClr val="B45309"/>
+          </a:solidFill>
+          <a:ln w="12700">
+            <a:solidFill>
+              <a:srgbClr val="B45309"/>
+            </a:solidFill>
+            <a:prstDash val="solid"/>
+          </a:ln>
+        </p:spPr>
+      </p:sp>
+      <p:sp>
+        <p:nvSpPr>
+          <p:cNvPr id="22" name="Shape 18"/>
+          <p:cNvSpPr/>
+          <p:nvPr/>
+        </p:nvSpPr>
+        <p:spPr>
+          <a:xfrm>
+            <a:off x="6729933" y="91440"/>
+            <a:ext cx="27432" cy="274320"/>
+          </a:xfrm>
+          <a:prstGeom prst="rect">
+            <a:avLst/>
+          </a:prstGeom>
+          <a:solidFill>
+            <a:srgbClr val="B45309"/>
+          </a:solidFill>
+          <a:ln w="12700">
+            <a:solidFill>
+              <a:srgbClr val="B45309"/>
+            </a:solidFill>
+            <a:prstDash val="solid"/>
+          </a:ln>
+        </p:spPr>
+      </p:sp>
+      <p:pic>
+        <p:nvPicPr>
+          <p:cNvPr id="23" name="Image 2" descr="preencoded.png">    </p:cNvPr>
+          <p:cNvPicPr>
+            <a:picLocks noChangeAspect="1"/>
+          </p:cNvPicPr>
+          <p:nvPr/>
+        </p:nvPicPr>
+        <p:blipFill>
+          <a:blip r:embed="rId3"/>
+          <a:stretch>
+            <a:fillRect/>
+          </a:stretch>
+        </p:blipFill>
+        <p:spPr>
+          <a:xfrm>
+            <a:off x="6803085" y="128016"/>
+            <a:ext cx="201168" cy="201168"/>
+          </a:xfrm>
+          <a:prstGeom prst="rect">
+            <a:avLst/>
+          </a:prstGeom>
+        </p:spPr>
+      </p:pic>
+      <p:sp>
+        <p:nvSpPr>
+          <p:cNvPr id="24" name="Text 19"/>
+          <p:cNvSpPr txBox="1"/>
+          <p:nvPr/>
+        </p:nvSpPr>
+        <p:spPr>
+          <a:xfrm>
+            <a:off x="7059117" y="91440"/>
+            <a:ext cx="1705356" cy="274320"/>
+          </a:xfrm>
+          <a:prstGeom prst="rect">
+            <a:avLst/>
+          </a:prstGeom>
+          <a:noFill/>
+          <a:ln/>
+        </p:spPr>
+        <p:txBody>
+          <a:bodyPr wrap="square" lIns="0" tIns="0" rIns="0" bIns="0" rtlCol="0" anchor="ctr"/>
+          <a:lstStyle/>
+          <a:p>
+            <a:pPr indent="0" marL="0">
+              <a:buNone/>
+            </a:pPr>
+            <a:r>
+              <a:rPr lang="en-US" sz="1100" b="1" dirty="0">
+                <a:solidFill>
+                  <a:srgbClr val="92400E"/>
+                </a:solidFill>
+                <a:latin typeface="Calibri" pitchFamily="34" charset="0"/>
+                <a:ea typeface="Calibri" pitchFamily="34" charset="-122"/>
+                <a:cs typeface="Calibri" pitchFamily="34" charset="-120"/>
+              </a:rPr>
+              <a:t>DA UTILIZZARE OGGI</a:t>
+            </a:r>
+            <a:endParaRPr lang="en-US" sz="1100" dirty="0"/>
+          </a:p>
+        </p:txBody>
+      </p:sp>
+      <p:sp>
+        <p:nvSpPr>
+          <p:cNvPr id="25" name="Shape 20"/>
+          <p:cNvSpPr/>
+          <p:nvPr/>
+        </p:nvSpPr>
+        <p:spPr>
+          <a:xfrm>
+            <a:off x="4352747" y="91440"/>
+            <a:ext cx="2212594" cy="274320"/>
+          </a:xfrm>
+          <a:prstGeom prst="rect">
+            <a:avLst/>
+          </a:prstGeom>
+          <a:solidFill>
+            <a:srgbClr val="E0F2FE"/>
+          </a:solidFill>
+          <a:ln w="12700">
+            <a:solidFill>
+              <a:srgbClr val="0369A1"/>
+            </a:solidFill>
+            <a:prstDash val="solid"/>
+          </a:ln>
+        </p:spPr>
+      </p:sp>
+      <p:sp>
+        <p:nvSpPr>
+          <p:cNvPr id="26" name="Shape 21"/>
+          <p:cNvSpPr/>
+          <p:nvPr/>
+        </p:nvSpPr>
+        <p:spPr>
+          <a:xfrm>
+            <a:off x="4352747" y="91440"/>
+            <a:ext cx="73152" cy="274320"/>
+          </a:xfrm>
+          <a:prstGeom prst="rect">
+            <a:avLst/>
+          </a:prstGeom>
+          <a:solidFill>
+            <a:srgbClr val="0369A1"/>
+          </a:solidFill>
+          <a:ln w="12700">
+            <a:solidFill>
+              <a:srgbClr val="0369A1"/>
+            </a:solidFill>
+            <a:prstDash val="solid"/>
+          </a:ln>
+        </p:spPr>
+      </p:sp>
+      <p:pic>
+        <p:nvPicPr>
+          <p:cNvPr id="27" name="Image 3" descr="preencoded.png">    </p:cNvPr>
+          <p:cNvPicPr>
+            <a:picLocks noChangeAspect="1"/>
+          </p:cNvPicPr>
+          <p:nvPr/>
+        </p:nvPicPr>
+        <p:blipFill>
+          <a:blip r:embed="rId4"/>
+          <a:stretch>
+            <a:fillRect/>
+          </a:stretch>
+        </p:blipFill>
+        <p:spPr>
+          <a:xfrm>
+            <a:off x="4480763" y="128016"/>
+            <a:ext cx="201168" cy="201168"/>
+          </a:xfrm>
+          <a:prstGeom prst="rect">
+            <a:avLst/>
+          </a:prstGeom>
+        </p:spPr>
+      </p:pic>
+      <p:sp>
+        <p:nvSpPr>
+          <p:cNvPr id="28" name="Text 22"/>
+          <p:cNvSpPr txBox="1"/>
+          <p:nvPr/>
+        </p:nvSpPr>
+        <p:spPr>
+          <a:xfrm>
+            <a:off x="4736795" y="91440"/>
+            <a:ext cx="1791970" cy="274320"/>
+          </a:xfrm>
+          <a:prstGeom prst="rect">
+            <a:avLst/>
+          </a:prstGeom>
+          <a:noFill/>
+          <a:ln/>
+        </p:spPr>
+        <p:txBody>
+          <a:bodyPr wrap="square" lIns="0" tIns="0" rIns="0" bIns="0" rtlCol="0" anchor="ctr"/>
+          <a:lstStyle/>
+          <a:p>
+            <a:pPr indent="0" marL="0">
+              <a:buNone/>
+            </a:pPr>
+            <a:r>
+              <a:rPr lang="en-US" sz="1100" b="1" dirty="0">
+                <a:solidFill>
+                  <a:srgbClr val="075985"/>
+                </a:solidFill>
+                <a:latin typeface="Calibri" pitchFamily="34" charset="0"/>
+                <a:ea typeface="Calibri" pitchFamily="34" charset="-122"/>
+                <a:cs typeface="Calibri" pitchFamily="34" charset="-120"/>
+              </a:rPr>
+              <a:t>DA COMPRENDERE OGGI</a:t>
+            </a:r>
+            <a:endParaRPr lang="en-US" sz="1100" dirty="0"/>
+          </a:p>
+        </p:txBody>
+      </p:sp>
+      <p:sp>
+        <p:nvSpPr>
           <p:cNvPr id="25" name="Slide Number Placeholder 0"/>
           <p:cNvSpPr>
             <a:spLocks noGrp="1"/>
@@ -3562,6 +3990,158 @@
       </p:sp>
       <p:sp>
         <p:nvSpPr>
+          <p:cNvPr id="5" name="Shape 3"/>
+          <p:cNvSpPr/>
+          <p:nvPr/>
+        </p:nvSpPr>
+        <p:spPr>
+          <a:xfrm>
+            <a:off x="7941259" y="91440"/>
+            <a:ext cx="3701796" cy="274320"/>
+          </a:xfrm>
+          <a:prstGeom prst="rect">
+            <a:avLst/>
+          </a:prstGeom>
+          <a:solidFill>
+            <a:srgbClr val="FEF3C7"/>
+          </a:solidFill>
+          <a:ln w="12700">
+            <a:solidFill>
+              <a:srgbClr val="B45309"/>
+            </a:solidFill>
+            <a:prstDash val="solid"/>
+          </a:ln>
+        </p:spPr>
+      </p:sp>
+      <p:sp>
+        <p:nvSpPr>
+          <p:cNvPr id="6" name="Shape 4"/>
+          <p:cNvSpPr/>
+          <p:nvPr/>
+        </p:nvSpPr>
+        <p:spPr>
+          <a:xfrm>
+            <a:off x="7941259" y="91440"/>
+            <a:ext cx="27432" cy="274320"/>
+          </a:xfrm>
+          <a:prstGeom prst="rect">
+            <a:avLst/>
+          </a:prstGeom>
+          <a:solidFill>
+            <a:srgbClr val="B45309"/>
+          </a:solidFill>
+          <a:ln w="12700">
+            <a:solidFill>
+              <a:srgbClr val="B45309"/>
+            </a:solidFill>
+            <a:prstDash val="solid"/>
+          </a:ln>
+        </p:spPr>
+      </p:sp>
+      <p:sp>
+        <p:nvSpPr>
+          <p:cNvPr id="7" name="Shape 5"/>
+          <p:cNvSpPr/>
+          <p:nvPr/>
+        </p:nvSpPr>
+        <p:spPr>
+          <a:xfrm>
+            <a:off x="7996123" y="91440"/>
+            <a:ext cx="27432" cy="274320"/>
+          </a:xfrm>
+          <a:prstGeom prst="rect">
+            <a:avLst/>
+          </a:prstGeom>
+          <a:solidFill>
+            <a:srgbClr val="B45309"/>
+          </a:solidFill>
+          <a:ln w="12700">
+            <a:solidFill>
+              <a:srgbClr val="B45309"/>
+            </a:solidFill>
+            <a:prstDash val="solid"/>
+          </a:ln>
+        </p:spPr>
+      </p:sp>
+      <p:pic>
+        <p:nvPicPr>
+          <p:cNvPr id="8" name="Image 0" descr="preencoded.png">    </p:cNvPr>
+          <p:cNvPicPr>
+            <a:picLocks noChangeAspect="1"/>
+          </p:cNvPicPr>
+          <p:nvPr/>
+        </p:nvPicPr>
+        <p:blipFill>
+          <a:blip r:embed="rId1"/>
+          <a:stretch>
+            <a:fillRect/>
+          </a:stretch>
+        </p:blipFill>
+        <p:spPr>
+          <a:xfrm>
+            <a:off x="8069275" y="128016"/>
+            <a:ext cx="201168" cy="201168"/>
+          </a:xfrm>
+          <a:prstGeom prst="rect">
+            <a:avLst/>
+          </a:prstGeom>
+        </p:spPr>
+      </p:pic>
+      <p:sp>
+        <p:nvSpPr>
+          <p:cNvPr id="9" name="Text 6"/>
+          <p:cNvSpPr txBox="1"/>
+          <p:nvPr/>
+        </p:nvSpPr>
+        <p:spPr>
+          <a:xfrm>
+            <a:off x="8325307" y="91440"/>
+            <a:ext cx="3281172" cy="274320"/>
+          </a:xfrm>
+          <a:prstGeom prst="rect">
+            <a:avLst/>
+          </a:prstGeom>
+          <a:noFill/>
+          <a:ln/>
+        </p:spPr>
+        <p:txBody>
+          <a:bodyPr wrap="square" lIns="0" tIns="0" rIns="0" bIns="0" rtlCol="0" anchor="ctr"/>
+          <a:lstStyle/>
+          <a:p>
+            <a:pPr indent="0" marL="0">
+              <a:buNone/>
+            </a:pPr>
+            <a:r>
+              <a:rPr lang="en-US" sz="1100" b="1" dirty="0">
+                <a:solidFill>
+                  <a:srgbClr val="92400E"/>
+                </a:solidFill>
+                <a:latin typeface="Calibri" pitchFamily="34" charset="0"/>
+                <a:ea typeface="Calibri" pitchFamily="34" charset="-122"/>
+                <a:cs typeface="Calibri" pitchFamily="34" charset="-120"/>
+              </a:rPr>
+              <a:t>DA UTILIZZARE OGGI</a:t>
+            </a:r>
+            <a:pPr indent="0" marL="0">
+              <a:buNone/>
+            </a:pPr>
+            <a:r>
+              <a:rPr lang="en-US" sz="1100" dirty="0">
+                <a:solidFill>
+                  <a:srgbClr val="92400E"/>
+                </a:solidFill>
+                <a:latin typeface="Calibri" pitchFamily="34" charset="0"/>
+                <a:ea typeface="Calibri" pitchFamily="34" charset="-122"/>
+                <a:cs typeface="Calibri" pitchFamily="34" charset="-120"/>
+              </a:rPr>
+              <a:t> · il programma completo</a:t>
+            </a:r>
+            <a:endParaRPr lang="en-US" sz="1100" dirty="0"/>
+          </a:p>
+        </p:txBody>
+      </p:sp>
+      <p:sp>
+        <p:nvSpPr>
           <p:cNvPr id="25" name="Slide Number Placeholder 0"/>
           <p:cNvSpPr>
             <a:spLocks noGrp="1"/>
@@ -4715,6 +5295,158 @@
       </p:sp>
       <p:sp>
         <p:nvSpPr>
+          <p:cNvPr id="17" name="Shape 15"/>
+          <p:cNvSpPr/>
+          <p:nvPr/>
+        </p:nvSpPr>
+        <p:spPr>
+          <a:xfrm>
+            <a:off x="7875600" y="91440"/>
+            <a:ext cx="3767455" cy="274320"/>
+          </a:xfrm>
+          <a:prstGeom prst="rect">
+            <a:avLst/>
+          </a:prstGeom>
+          <a:solidFill>
+            <a:srgbClr val="FEF3C7"/>
+          </a:solidFill>
+          <a:ln w="12700">
+            <a:solidFill>
+              <a:srgbClr val="B45309"/>
+            </a:solidFill>
+            <a:prstDash val="solid"/>
+          </a:ln>
+        </p:spPr>
+      </p:sp>
+      <p:sp>
+        <p:nvSpPr>
+          <p:cNvPr id="18" name="Shape 16"/>
+          <p:cNvSpPr/>
+          <p:nvPr/>
+        </p:nvSpPr>
+        <p:spPr>
+          <a:xfrm>
+            <a:off x="7875600" y="91440"/>
+            <a:ext cx="27432" cy="274320"/>
+          </a:xfrm>
+          <a:prstGeom prst="rect">
+            <a:avLst/>
+          </a:prstGeom>
+          <a:solidFill>
+            <a:srgbClr val="B45309"/>
+          </a:solidFill>
+          <a:ln w="12700">
+            <a:solidFill>
+              <a:srgbClr val="B45309"/>
+            </a:solidFill>
+            <a:prstDash val="solid"/>
+          </a:ln>
+        </p:spPr>
+      </p:sp>
+      <p:sp>
+        <p:nvSpPr>
+          <p:cNvPr id="19" name="Shape 17"/>
+          <p:cNvSpPr/>
+          <p:nvPr/>
+        </p:nvSpPr>
+        <p:spPr>
+          <a:xfrm>
+            <a:off x="7930464" y="91440"/>
+            <a:ext cx="27432" cy="274320"/>
+          </a:xfrm>
+          <a:prstGeom prst="rect">
+            <a:avLst/>
+          </a:prstGeom>
+          <a:solidFill>
+            <a:srgbClr val="B45309"/>
+          </a:solidFill>
+          <a:ln w="12700">
+            <a:solidFill>
+              <a:srgbClr val="B45309"/>
+            </a:solidFill>
+            <a:prstDash val="solid"/>
+          </a:ln>
+        </p:spPr>
+      </p:sp>
+      <p:pic>
+        <p:nvPicPr>
+          <p:cNvPr id="20" name="Image 0" descr="preencoded.png">    </p:cNvPr>
+          <p:cNvPicPr>
+            <a:picLocks noChangeAspect="1"/>
+          </p:cNvPicPr>
+          <p:nvPr/>
+        </p:nvPicPr>
+        <p:blipFill>
+          <a:blip r:embed="rId1"/>
+          <a:stretch>
+            <a:fillRect/>
+          </a:stretch>
+        </p:blipFill>
+        <p:spPr>
+          <a:xfrm>
+            <a:off x="8003616" y="128016"/>
+            <a:ext cx="201168" cy="201168"/>
+          </a:xfrm>
+          <a:prstGeom prst="rect">
+            <a:avLst/>
+          </a:prstGeom>
+        </p:spPr>
+      </p:pic>
+      <p:sp>
+        <p:nvSpPr>
+          <p:cNvPr id="21" name="Text 18"/>
+          <p:cNvSpPr txBox="1"/>
+          <p:nvPr/>
+        </p:nvSpPr>
+        <p:spPr>
+          <a:xfrm>
+            <a:off x="8259648" y="91440"/>
+            <a:ext cx="3346831" cy="274320"/>
+          </a:xfrm>
+          <a:prstGeom prst="rect">
+            <a:avLst/>
+          </a:prstGeom>
+          <a:noFill/>
+          <a:ln/>
+        </p:spPr>
+        <p:txBody>
+          <a:bodyPr wrap="square" lIns="0" tIns="0" rIns="0" bIns="0" rtlCol="0" anchor="ctr"/>
+          <a:lstStyle/>
+          <a:p>
+            <a:pPr indent="0" marL="0">
+              <a:buNone/>
+            </a:pPr>
+            <a:r>
+              <a:rPr lang="en-US" sz="1100" b="1" dirty="0">
+                <a:solidFill>
+                  <a:srgbClr val="92400E"/>
+                </a:solidFill>
+                <a:latin typeface="Calibri" pitchFamily="34" charset="0"/>
+                <a:ea typeface="Calibri" pitchFamily="34" charset="-122"/>
+                <a:cs typeface="Calibri" pitchFamily="34" charset="-120"/>
+              </a:rPr>
+              <a:t>DA UTILIZZARE OGGI</a:t>
+            </a:r>
+            <a:pPr indent="0" marL="0">
+              <a:buNone/>
+            </a:pPr>
+            <a:r>
+              <a:rPr lang="en-US" sz="1100" dirty="0">
+                <a:solidFill>
+                  <a:srgbClr val="92400E"/>
+                </a:solidFill>
+                <a:latin typeface="Calibri" pitchFamily="34" charset="0"/>
+                <a:ea typeface="Calibri" pitchFamily="34" charset="-122"/>
+                <a:cs typeface="Calibri" pitchFamily="34" charset="-120"/>
+              </a:rPr>
+              <a:t> · gli strumenti di PRG32</a:t>
+            </a:r>
+            <a:endParaRPr lang="en-US" sz="1100" dirty="0"/>
+          </a:p>
+        </p:txBody>
+      </p:sp>
+      <p:sp>
+        <p:nvSpPr>
           <p:cNvPr id="25" name="Slide Number Placeholder 0"/>
           <p:cNvSpPr>
             <a:spLocks noGrp="1"/>
@@ -5551,6 +6283,158 @@
       </p:sp>
       <p:sp>
         <p:nvSpPr>
+          <p:cNvPr id="17" name="Shape 15"/>
+          <p:cNvSpPr/>
+          <p:nvPr/>
+        </p:nvSpPr>
+        <p:spPr>
+          <a:xfrm>
+            <a:off x="7875600" y="91440"/>
+            <a:ext cx="3767455" cy="274320"/>
+          </a:xfrm>
+          <a:prstGeom prst="rect">
+            <a:avLst/>
+          </a:prstGeom>
+          <a:solidFill>
+            <a:srgbClr val="FEF3C7"/>
+          </a:solidFill>
+          <a:ln w="12700">
+            <a:solidFill>
+              <a:srgbClr val="B45309"/>
+            </a:solidFill>
+            <a:prstDash val="solid"/>
+          </a:ln>
+        </p:spPr>
+      </p:sp>
+      <p:sp>
+        <p:nvSpPr>
+          <p:cNvPr id="18" name="Shape 16"/>
+          <p:cNvSpPr/>
+          <p:nvPr/>
+        </p:nvSpPr>
+        <p:spPr>
+          <a:xfrm>
+            <a:off x="7875600" y="91440"/>
+            <a:ext cx="27432" cy="274320"/>
+          </a:xfrm>
+          <a:prstGeom prst="rect">
+            <a:avLst/>
+          </a:prstGeom>
+          <a:solidFill>
+            <a:srgbClr val="B45309"/>
+          </a:solidFill>
+          <a:ln w="12700">
+            <a:solidFill>
+              <a:srgbClr val="B45309"/>
+            </a:solidFill>
+            <a:prstDash val="solid"/>
+          </a:ln>
+        </p:spPr>
+      </p:sp>
+      <p:sp>
+        <p:nvSpPr>
+          <p:cNvPr id="19" name="Shape 17"/>
+          <p:cNvSpPr/>
+          <p:nvPr/>
+        </p:nvSpPr>
+        <p:spPr>
+          <a:xfrm>
+            <a:off x="7930464" y="91440"/>
+            <a:ext cx="27432" cy="274320"/>
+          </a:xfrm>
+          <a:prstGeom prst="rect">
+            <a:avLst/>
+          </a:prstGeom>
+          <a:solidFill>
+            <a:srgbClr val="B45309"/>
+          </a:solidFill>
+          <a:ln w="12700">
+            <a:solidFill>
+              <a:srgbClr val="B45309"/>
+            </a:solidFill>
+            <a:prstDash val="solid"/>
+          </a:ln>
+        </p:spPr>
+      </p:sp>
+      <p:pic>
+        <p:nvPicPr>
+          <p:cNvPr id="20" name="Image 0" descr="preencoded.png">    </p:cNvPr>
+          <p:cNvPicPr>
+            <a:picLocks noChangeAspect="1"/>
+          </p:cNvPicPr>
+          <p:nvPr/>
+        </p:nvPicPr>
+        <p:blipFill>
+          <a:blip r:embed="rId1"/>
+          <a:stretch>
+            <a:fillRect/>
+          </a:stretch>
+        </p:blipFill>
+        <p:spPr>
+          <a:xfrm>
+            <a:off x="8003616" y="128016"/>
+            <a:ext cx="201168" cy="201168"/>
+          </a:xfrm>
+          <a:prstGeom prst="rect">
+            <a:avLst/>
+          </a:prstGeom>
+        </p:spPr>
+      </p:pic>
+      <p:sp>
+        <p:nvSpPr>
+          <p:cNvPr id="21" name="Text 18"/>
+          <p:cNvSpPr txBox="1"/>
+          <p:nvPr/>
+        </p:nvSpPr>
+        <p:spPr>
+          <a:xfrm>
+            <a:off x="8259648" y="91440"/>
+            <a:ext cx="3346831" cy="274320"/>
+          </a:xfrm>
+          <a:prstGeom prst="rect">
+            <a:avLst/>
+          </a:prstGeom>
+          <a:noFill/>
+          <a:ln/>
+        </p:spPr>
+        <p:txBody>
+          <a:bodyPr wrap="square" lIns="0" tIns="0" rIns="0" bIns="0" rtlCol="0" anchor="ctr"/>
+          <a:lstStyle/>
+          <a:p>
+            <a:pPr indent="0" marL="0">
+              <a:buNone/>
+            </a:pPr>
+            <a:r>
+              <a:rPr lang="en-US" sz="1100" b="1" dirty="0">
+                <a:solidFill>
+                  <a:srgbClr val="92400E"/>
+                </a:solidFill>
+                <a:latin typeface="Calibri" pitchFamily="34" charset="0"/>
+                <a:ea typeface="Calibri" pitchFamily="34" charset="-122"/>
+                <a:cs typeface="Calibri" pitchFamily="34" charset="-120"/>
+              </a:rPr>
+              <a:t>DA UTILIZZARE OGGI</a:t>
+            </a:r>
+            <a:pPr indent="0" marL="0">
+              <a:buNone/>
+            </a:pPr>
+            <a:r>
+              <a:rPr lang="en-US" sz="1100" dirty="0">
+                <a:solidFill>
+                  <a:srgbClr val="92400E"/>
+                </a:solidFill>
+                <a:latin typeface="Calibri" pitchFamily="34" charset="0"/>
+                <a:ea typeface="Calibri" pitchFamily="34" charset="-122"/>
+                <a:cs typeface="Calibri" pitchFamily="34" charset="-120"/>
+              </a:rPr>
+              <a:t> · gli strumenti di PRG32</a:t>
+            </a:r>
+            <a:endParaRPr lang="en-US" sz="1100" dirty="0"/>
+          </a:p>
+        </p:txBody>
+      </p:sp>
+      <p:sp>
+        <p:nvSpPr>
           <p:cNvPr id="25" name="Slide Number Placeholder 0"/>
           <p:cNvSpPr>
             <a:spLocks noGrp="1"/>
@@ -6380,6 +7264,158 @@
                 <a:cs typeface="Calibri" pitchFamily="34" charset="-120"/>
               </a:rPr>
               <a:t>Schermo nero: confrontate il cablaggio del display con il firmware</a:t>
+            </a:r>
+            <a:endParaRPr lang="en-US" sz="1100" dirty="0"/>
+          </a:p>
+        </p:txBody>
+      </p:sp>
+      <p:sp>
+        <p:nvSpPr>
+          <p:cNvPr id="17" name="Shape 15"/>
+          <p:cNvSpPr/>
+          <p:nvPr/>
+        </p:nvSpPr>
+        <p:spPr>
+          <a:xfrm>
+            <a:off x="7875600" y="91440"/>
+            <a:ext cx="3767455" cy="274320"/>
+          </a:xfrm>
+          <a:prstGeom prst="rect">
+            <a:avLst/>
+          </a:prstGeom>
+          <a:solidFill>
+            <a:srgbClr val="FEF3C7"/>
+          </a:solidFill>
+          <a:ln w="12700">
+            <a:solidFill>
+              <a:srgbClr val="B45309"/>
+            </a:solidFill>
+            <a:prstDash val="solid"/>
+          </a:ln>
+        </p:spPr>
+      </p:sp>
+      <p:sp>
+        <p:nvSpPr>
+          <p:cNvPr id="18" name="Shape 16"/>
+          <p:cNvSpPr/>
+          <p:nvPr/>
+        </p:nvSpPr>
+        <p:spPr>
+          <a:xfrm>
+            <a:off x="7875600" y="91440"/>
+            <a:ext cx="27432" cy="274320"/>
+          </a:xfrm>
+          <a:prstGeom prst="rect">
+            <a:avLst/>
+          </a:prstGeom>
+          <a:solidFill>
+            <a:srgbClr val="B45309"/>
+          </a:solidFill>
+          <a:ln w="12700">
+            <a:solidFill>
+              <a:srgbClr val="B45309"/>
+            </a:solidFill>
+            <a:prstDash val="solid"/>
+          </a:ln>
+        </p:spPr>
+      </p:sp>
+      <p:sp>
+        <p:nvSpPr>
+          <p:cNvPr id="19" name="Shape 17"/>
+          <p:cNvSpPr/>
+          <p:nvPr/>
+        </p:nvSpPr>
+        <p:spPr>
+          <a:xfrm>
+            <a:off x="7930464" y="91440"/>
+            <a:ext cx="27432" cy="274320"/>
+          </a:xfrm>
+          <a:prstGeom prst="rect">
+            <a:avLst/>
+          </a:prstGeom>
+          <a:solidFill>
+            <a:srgbClr val="B45309"/>
+          </a:solidFill>
+          <a:ln w="12700">
+            <a:solidFill>
+              <a:srgbClr val="B45309"/>
+            </a:solidFill>
+            <a:prstDash val="solid"/>
+          </a:ln>
+        </p:spPr>
+      </p:sp>
+      <p:pic>
+        <p:nvPicPr>
+          <p:cNvPr id="20" name="Image 0" descr="preencoded.png">    </p:cNvPr>
+          <p:cNvPicPr>
+            <a:picLocks noChangeAspect="1"/>
+          </p:cNvPicPr>
+          <p:nvPr/>
+        </p:nvPicPr>
+        <p:blipFill>
+          <a:blip r:embed="rId1"/>
+          <a:stretch>
+            <a:fillRect/>
+          </a:stretch>
+        </p:blipFill>
+        <p:spPr>
+          <a:xfrm>
+            <a:off x="8003616" y="128016"/>
+            <a:ext cx="201168" cy="201168"/>
+          </a:xfrm>
+          <a:prstGeom prst="rect">
+            <a:avLst/>
+          </a:prstGeom>
+        </p:spPr>
+      </p:pic>
+      <p:sp>
+        <p:nvSpPr>
+          <p:cNvPr id="21" name="Text 18"/>
+          <p:cNvSpPr txBox="1"/>
+          <p:nvPr/>
+        </p:nvSpPr>
+        <p:spPr>
+          <a:xfrm>
+            <a:off x="8259648" y="91440"/>
+            <a:ext cx="3346831" cy="274320"/>
+          </a:xfrm>
+          <a:prstGeom prst="rect">
+            <a:avLst/>
+          </a:prstGeom>
+          <a:noFill/>
+          <a:ln/>
+        </p:spPr>
+        <p:txBody>
+          <a:bodyPr wrap="square" lIns="0" tIns="0" rIns="0" bIns="0" rtlCol="0" anchor="ctr"/>
+          <a:lstStyle/>
+          <a:p>
+            <a:pPr indent="0" marL="0">
+              <a:buNone/>
+            </a:pPr>
+            <a:r>
+              <a:rPr lang="en-US" sz="1100" b="1" dirty="0">
+                <a:solidFill>
+                  <a:srgbClr val="92400E"/>
+                </a:solidFill>
+                <a:latin typeface="Calibri" pitchFamily="34" charset="0"/>
+                <a:ea typeface="Calibri" pitchFamily="34" charset="-122"/>
+                <a:cs typeface="Calibri" pitchFamily="34" charset="-120"/>
+              </a:rPr>
+              <a:t>DA UTILIZZARE OGGI</a:t>
+            </a:r>
+            <a:pPr indent="0" marL="0">
+              <a:buNone/>
+            </a:pPr>
+            <a:r>
+              <a:rPr lang="en-US" sz="1100" dirty="0">
+                <a:solidFill>
+                  <a:srgbClr val="92400E"/>
+                </a:solidFill>
+                <a:latin typeface="Calibri" pitchFamily="34" charset="0"/>
+                <a:ea typeface="Calibri" pitchFamily="34" charset="-122"/>
+                <a:cs typeface="Calibri" pitchFamily="34" charset="-120"/>
+              </a:rPr>
+              <a:t> · gli strumenti di PRG32</a:t>
             </a:r>
             <a:endParaRPr lang="en-US" sz="1100" dirty="0"/>
           </a:p>
@@ -7768,6 +8804,158 @@
       </p:graphicFrame>
       <p:sp>
         <p:nvSpPr>
+          <p:cNvPr id="4" name="Shape 1"/>
+          <p:cNvSpPr/>
+          <p:nvPr/>
+        </p:nvSpPr>
+        <p:spPr>
+          <a:xfrm>
+            <a:off x="7875600" y="91440"/>
+            <a:ext cx="3767455" cy="274320"/>
+          </a:xfrm>
+          <a:prstGeom prst="rect">
+            <a:avLst/>
+          </a:prstGeom>
+          <a:solidFill>
+            <a:srgbClr val="FEF3C7"/>
+          </a:solidFill>
+          <a:ln w="12700">
+            <a:solidFill>
+              <a:srgbClr val="B45309"/>
+            </a:solidFill>
+            <a:prstDash val="solid"/>
+          </a:ln>
+        </p:spPr>
+      </p:sp>
+      <p:sp>
+        <p:nvSpPr>
+          <p:cNvPr id="5" name="Shape 2"/>
+          <p:cNvSpPr/>
+          <p:nvPr/>
+        </p:nvSpPr>
+        <p:spPr>
+          <a:xfrm>
+            <a:off x="7875600" y="91440"/>
+            <a:ext cx="27432" cy="274320"/>
+          </a:xfrm>
+          <a:prstGeom prst="rect">
+            <a:avLst/>
+          </a:prstGeom>
+          <a:solidFill>
+            <a:srgbClr val="B45309"/>
+          </a:solidFill>
+          <a:ln w="12700">
+            <a:solidFill>
+              <a:srgbClr val="B45309"/>
+            </a:solidFill>
+            <a:prstDash val="solid"/>
+          </a:ln>
+        </p:spPr>
+      </p:sp>
+      <p:sp>
+        <p:nvSpPr>
+          <p:cNvPr id="6" name="Shape 3"/>
+          <p:cNvSpPr/>
+          <p:nvPr/>
+        </p:nvSpPr>
+        <p:spPr>
+          <a:xfrm>
+            <a:off x="7930464" y="91440"/>
+            <a:ext cx="27432" cy="274320"/>
+          </a:xfrm>
+          <a:prstGeom prst="rect">
+            <a:avLst/>
+          </a:prstGeom>
+          <a:solidFill>
+            <a:srgbClr val="B45309"/>
+          </a:solidFill>
+          <a:ln w="12700">
+            <a:solidFill>
+              <a:srgbClr val="B45309"/>
+            </a:solidFill>
+            <a:prstDash val="solid"/>
+          </a:ln>
+        </p:spPr>
+      </p:sp>
+      <p:pic>
+        <p:nvPicPr>
+          <p:cNvPr id="7" name="Image 0" descr="preencoded.png">    </p:cNvPr>
+          <p:cNvPicPr>
+            <a:picLocks noChangeAspect="1"/>
+          </p:cNvPicPr>
+          <p:nvPr/>
+        </p:nvPicPr>
+        <p:blipFill>
+          <a:blip r:embed="rId1"/>
+          <a:stretch>
+            <a:fillRect/>
+          </a:stretch>
+        </p:blipFill>
+        <p:spPr>
+          <a:xfrm>
+            <a:off x="8003616" y="128016"/>
+            <a:ext cx="201168" cy="201168"/>
+          </a:xfrm>
+          <a:prstGeom prst="rect">
+            <a:avLst/>
+          </a:prstGeom>
+        </p:spPr>
+      </p:pic>
+      <p:sp>
+        <p:nvSpPr>
+          <p:cNvPr id="8" name="Text 4"/>
+          <p:cNvSpPr txBox="1"/>
+          <p:nvPr/>
+        </p:nvSpPr>
+        <p:spPr>
+          <a:xfrm>
+            <a:off x="8259648" y="91440"/>
+            <a:ext cx="3346831" cy="274320"/>
+          </a:xfrm>
+          <a:prstGeom prst="rect">
+            <a:avLst/>
+          </a:prstGeom>
+          <a:noFill/>
+          <a:ln/>
+        </p:spPr>
+        <p:txBody>
+          <a:bodyPr wrap="square" lIns="0" tIns="0" rIns="0" bIns="0" rtlCol="0" anchor="ctr"/>
+          <a:lstStyle/>
+          <a:p>
+            <a:pPr indent="0" marL="0">
+              <a:buNone/>
+            </a:pPr>
+            <a:r>
+              <a:rPr lang="en-US" sz="1100" b="1" dirty="0">
+                <a:solidFill>
+                  <a:srgbClr val="92400E"/>
+                </a:solidFill>
+                <a:latin typeface="Calibri" pitchFamily="34" charset="0"/>
+                <a:ea typeface="Calibri" pitchFamily="34" charset="-122"/>
+                <a:cs typeface="Calibri" pitchFamily="34" charset="-120"/>
+              </a:rPr>
+              <a:t>DA UTILIZZARE OGGI</a:t>
+            </a:r>
+            <a:pPr indent="0" marL="0">
+              <a:buNone/>
+            </a:pPr>
+            <a:r>
+              <a:rPr lang="en-US" sz="1100" dirty="0">
+                <a:solidFill>
+                  <a:srgbClr val="92400E"/>
+                </a:solidFill>
+                <a:latin typeface="Calibri" pitchFamily="34" charset="0"/>
+                <a:ea typeface="Calibri" pitchFamily="34" charset="-122"/>
+                <a:cs typeface="Calibri" pitchFamily="34" charset="-120"/>
+              </a:rPr>
+              <a:t> · gli strumenti di PRG32</a:t>
+            </a:r>
+            <a:endParaRPr lang="en-US" sz="1100" dirty="0"/>
+          </a:p>
+        </p:txBody>
+      </p:sp>
+      <p:sp>
+        <p:nvSpPr>
           <p:cNvPr id="25" name="Slide Number Placeholder 0"/>
           <p:cNvSpPr>
             <a:spLocks noGrp="1"/>
@@ -9925,6 +11113,158 @@
       </p:sp>
       <p:sp>
         <p:nvSpPr>
+          <p:cNvPr id="17" name="Shape 15"/>
+          <p:cNvSpPr/>
+          <p:nvPr/>
+        </p:nvSpPr>
+        <p:spPr>
+          <a:xfrm>
+            <a:off x="7350328" y="91440"/>
+            <a:ext cx="4292727" cy="274320"/>
+          </a:xfrm>
+          <a:prstGeom prst="rect">
+            <a:avLst/>
+          </a:prstGeom>
+          <a:solidFill>
+            <a:srgbClr val="FEF3C7"/>
+          </a:solidFill>
+          <a:ln w="12700">
+            <a:solidFill>
+              <a:srgbClr val="B45309"/>
+            </a:solidFill>
+            <a:prstDash val="solid"/>
+          </a:ln>
+        </p:spPr>
+      </p:sp>
+      <p:sp>
+        <p:nvSpPr>
+          <p:cNvPr id="18" name="Shape 16"/>
+          <p:cNvSpPr/>
+          <p:nvPr/>
+        </p:nvSpPr>
+        <p:spPr>
+          <a:xfrm>
+            <a:off x="7350328" y="91440"/>
+            <a:ext cx="27432" cy="274320"/>
+          </a:xfrm>
+          <a:prstGeom prst="rect">
+            <a:avLst/>
+          </a:prstGeom>
+          <a:solidFill>
+            <a:srgbClr val="B45309"/>
+          </a:solidFill>
+          <a:ln w="12700">
+            <a:solidFill>
+              <a:srgbClr val="B45309"/>
+            </a:solidFill>
+            <a:prstDash val="solid"/>
+          </a:ln>
+        </p:spPr>
+      </p:sp>
+      <p:sp>
+        <p:nvSpPr>
+          <p:cNvPr id="19" name="Shape 17"/>
+          <p:cNvSpPr/>
+          <p:nvPr/>
+        </p:nvSpPr>
+        <p:spPr>
+          <a:xfrm>
+            <a:off x="7405192" y="91440"/>
+            <a:ext cx="27432" cy="274320"/>
+          </a:xfrm>
+          <a:prstGeom prst="rect">
+            <a:avLst/>
+          </a:prstGeom>
+          <a:solidFill>
+            <a:srgbClr val="B45309"/>
+          </a:solidFill>
+          <a:ln w="12700">
+            <a:solidFill>
+              <a:srgbClr val="B45309"/>
+            </a:solidFill>
+            <a:prstDash val="solid"/>
+          </a:ln>
+        </p:spPr>
+      </p:sp>
+      <p:pic>
+        <p:nvPicPr>
+          <p:cNvPr id="20" name="Image 0" descr="preencoded.png">    </p:cNvPr>
+          <p:cNvPicPr>
+            <a:picLocks noChangeAspect="1"/>
+          </p:cNvPicPr>
+          <p:nvPr/>
+        </p:nvPicPr>
+        <p:blipFill>
+          <a:blip r:embed="rId1"/>
+          <a:stretch>
+            <a:fillRect/>
+          </a:stretch>
+        </p:blipFill>
+        <p:spPr>
+          <a:xfrm>
+            <a:off x="7478344" y="128016"/>
+            <a:ext cx="201168" cy="201168"/>
+          </a:xfrm>
+          <a:prstGeom prst="rect">
+            <a:avLst/>
+          </a:prstGeom>
+        </p:spPr>
+      </p:pic>
+      <p:sp>
+        <p:nvSpPr>
+          <p:cNvPr id="21" name="Text 18"/>
+          <p:cNvSpPr txBox="1"/>
+          <p:nvPr/>
+        </p:nvSpPr>
+        <p:spPr>
+          <a:xfrm>
+            <a:off x="7734376" y="91440"/>
+            <a:ext cx="3872103" cy="274320"/>
+          </a:xfrm>
+          <a:prstGeom prst="rect">
+            <a:avLst/>
+          </a:prstGeom>
+          <a:noFill/>
+          <a:ln/>
+        </p:spPr>
+        <p:txBody>
+          <a:bodyPr wrap="square" lIns="0" tIns="0" rIns="0" bIns="0" rtlCol="0" anchor="ctr"/>
+          <a:lstStyle/>
+          <a:p>
+            <a:pPr indent="0" marL="0">
+              <a:buNone/>
+            </a:pPr>
+            <a:r>
+              <a:rPr lang="en-US" sz="1100" b="1" dirty="0">
+                <a:solidFill>
+                  <a:srgbClr val="92400E"/>
+                </a:solidFill>
+                <a:latin typeface="Calibri" pitchFamily="34" charset="0"/>
+                <a:ea typeface="Calibri" pitchFamily="34" charset="-122"/>
+                <a:cs typeface="Calibri" pitchFamily="34" charset="-120"/>
+              </a:rPr>
+              <a:t>DA UTILIZZARE OGGI</a:t>
+            </a:r>
+            <a:pPr indent="0" marL="0">
+              <a:buNone/>
+            </a:pPr>
+            <a:r>
+              <a:rPr lang="en-US" sz="1100" dirty="0">
+                <a:solidFill>
+                  <a:srgbClr val="92400E"/>
+                </a:solidFill>
+                <a:latin typeface="Calibri" pitchFamily="34" charset="0"/>
+                <a:ea typeface="Calibri" pitchFamily="34" charset="-122"/>
+                <a:cs typeface="Calibri" pitchFamily="34" charset="-120"/>
+              </a:rPr>
+              <a:t> · le direttive dell'assemblatore</a:t>
+            </a:r>
+            <a:endParaRPr lang="en-US" sz="1100" dirty="0"/>
+          </a:p>
+        </p:txBody>
+      </p:sp>
+      <p:sp>
+        <p:nvSpPr>
           <p:cNvPr id="25" name="Slide Number Placeholder 0"/>
           <p:cNvSpPr>
             <a:spLocks noGrp="1"/>
@@ -10275,6 +11615,158 @@
       </p:sp>
       <p:sp>
         <p:nvSpPr>
+          <p:cNvPr id="5" name="Shape 3"/>
+          <p:cNvSpPr/>
+          <p:nvPr/>
+        </p:nvSpPr>
+        <p:spPr>
+          <a:xfrm>
+            <a:off x="7875600" y="91440"/>
+            <a:ext cx="3767455" cy="274320"/>
+          </a:xfrm>
+          <a:prstGeom prst="rect">
+            <a:avLst/>
+          </a:prstGeom>
+          <a:solidFill>
+            <a:srgbClr val="FEF3C7"/>
+          </a:solidFill>
+          <a:ln w="12700">
+            <a:solidFill>
+              <a:srgbClr val="B45309"/>
+            </a:solidFill>
+            <a:prstDash val="solid"/>
+          </a:ln>
+        </p:spPr>
+      </p:sp>
+      <p:sp>
+        <p:nvSpPr>
+          <p:cNvPr id="6" name="Shape 4"/>
+          <p:cNvSpPr/>
+          <p:nvPr/>
+        </p:nvSpPr>
+        <p:spPr>
+          <a:xfrm>
+            <a:off x="7875600" y="91440"/>
+            <a:ext cx="27432" cy="274320"/>
+          </a:xfrm>
+          <a:prstGeom prst="rect">
+            <a:avLst/>
+          </a:prstGeom>
+          <a:solidFill>
+            <a:srgbClr val="B45309"/>
+          </a:solidFill>
+          <a:ln w="12700">
+            <a:solidFill>
+              <a:srgbClr val="B45309"/>
+            </a:solidFill>
+            <a:prstDash val="solid"/>
+          </a:ln>
+        </p:spPr>
+      </p:sp>
+      <p:sp>
+        <p:nvSpPr>
+          <p:cNvPr id="7" name="Shape 5"/>
+          <p:cNvSpPr/>
+          <p:nvPr/>
+        </p:nvSpPr>
+        <p:spPr>
+          <a:xfrm>
+            <a:off x="7930464" y="91440"/>
+            <a:ext cx="27432" cy="274320"/>
+          </a:xfrm>
+          <a:prstGeom prst="rect">
+            <a:avLst/>
+          </a:prstGeom>
+          <a:solidFill>
+            <a:srgbClr val="B45309"/>
+          </a:solidFill>
+          <a:ln w="12700">
+            <a:solidFill>
+              <a:srgbClr val="B45309"/>
+            </a:solidFill>
+            <a:prstDash val="solid"/>
+          </a:ln>
+        </p:spPr>
+      </p:sp>
+      <p:pic>
+        <p:nvPicPr>
+          <p:cNvPr id="8" name="Image 0" descr="preencoded.png">    </p:cNvPr>
+          <p:cNvPicPr>
+            <a:picLocks noChangeAspect="1"/>
+          </p:cNvPicPr>
+          <p:nvPr/>
+        </p:nvPicPr>
+        <p:blipFill>
+          <a:blip r:embed="rId1"/>
+          <a:stretch>
+            <a:fillRect/>
+          </a:stretch>
+        </p:blipFill>
+        <p:spPr>
+          <a:xfrm>
+            <a:off x="8003616" y="128016"/>
+            <a:ext cx="201168" cy="201168"/>
+          </a:xfrm>
+          <a:prstGeom prst="rect">
+            <a:avLst/>
+          </a:prstGeom>
+        </p:spPr>
+      </p:pic>
+      <p:sp>
+        <p:nvSpPr>
+          <p:cNvPr id="9" name="Text 6"/>
+          <p:cNvSpPr txBox="1"/>
+          <p:nvPr/>
+        </p:nvSpPr>
+        <p:spPr>
+          <a:xfrm>
+            <a:off x="8259648" y="91440"/>
+            <a:ext cx="3346831" cy="274320"/>
+          </a:xfrm>
+          <a:prstGeom prst="rect">
+            <a:avLst/>
+          </a:prstGeom>
+          <a:noFill/>
+          <a:ln/>
+        </p:spPr>
+        <p:txBody>
+          <a:bodyPr wrap="square" lIns="0" tIns="0" rIns="0" bIns="0" rtlCol="0" anchor="ctr"/>
+          <a:lstStyle/>
+          <a:p>
+            <a:pPr indent="0" marL="0">
+              <a:buNone/>
+            </a:pPr>
+            <a:r>
+              <a:rPr lang="en-US" sz="1100" b="1" dirty="0">
+                <a:solidFill>
+                  <a:srgbClr val="92400E"/>
+                </a:solidFill>
+                <a:latin typeface="Calibri" pitchFamily="34" charset="0"/>
+                <a:ea typeface="Calibri" pitchFamily="34" charset="-122"/>
+                <a:cs typeface="Calibri" pitchFamily="34" charset="-120"/>
+              </a:rPr>
+              <a:t>DA UTILIZZARE OGGI</a:t>
+            </a:r>
+            <a:pPr indent="0" marL="0">
+              <a:buNone/>
+            </a:pPr>
+            <a:r>
+              <a:rPr lang="en-US" sz="1100" dirty="0">
+                <a:solidFill>
+                  <a:srgbClr val="92400E"/>
+                </a:solidFill>
+                <a:latin typeface="Calibri" pitchFamily="34" charset="0"/>
+                <a:ea typeface="Calibri" pitchFamily="34" charset="-122"/>
+                <a:cs typeface="Calibri" pitchFamily="34" charset="-120"/>
+              </a:rPr>
+              <a:t> · gli strumenti di PRG32</a:t>
+            </a:r>
+            <a:endParaRPr lang="en-US" sz="1100" dirty="0"/>
+          </a:p>
+        </p:txBody>
+      </p:sp>
+      <p:sp>
+        <p:nvSpPr>
           <p:cNvPr id="25" name="Slide Number Placeholder 0"/>
           <p:cNvSpPr>
             <a:spLocks noGrp="1"/>
@@ -11077,6 +12569,285 @@
       </p:sp>
       <p:sp>
         <p:nvSpPr>
+          <p:cNvPr id="10" name="Shape 7"/>
+          <p:cNvSpPr/>
+          <p:nvPr/>
+        </p:nvSpPr>
+        <p:spPr>
+          <a:xfrm>
+            <a:off x="7415987" y="91440"/>
+            <a:ext cx="4227068" cy="274320"/>
+          </a:xfrm>
+          <a:prstGeom prst="rect">
+            <a:avLst/>
+          </a:prstGeom>
+          <a:solidFill>
+            <a:srgbClr val="FEF3C7"/>
+          </a:solidFill>
+          <a:ln w="12700">
+            <a:solidFill>
+              <a:srgbClr val="B45309"/>
+            </a:solidFill>
+            <a:prstDash val="solid"/>
+          </a:ln>
+        </p:spPr>
+      </p:sp>
+      <p:sp>
+        <p:nvSpPr>
+          <p:cNvPr id="11" name="Shape 8"/>
+          <p:cNvSpPr/>
+          <p:nvPr/>
+        </p:nvSpPr>
+        <p:spPr>
+          <a:xfrm>
+            <a:off x="7415987" y="91440"/>
+            <a:ext cx="27432" cy="274320"/>
+          </a:xfrm>
+          <a:prstGeom prst="rect">
+            <a:avLst/>
+          </a:prstGeom>
+          <a:solidFill>
+            <a:srgbClr val="B45309"/>
+          </a:solidFill>
+          <a:ln w="12700">
+            <a:solidFill>
+              <a:srgbClr val="B45309"/>
+            </a:solidFill>
+            <a:prstDash val="solid"/>
+          </a:ln>
+        </p:spPr>
+      </p:sp>
+      <p:sp>
+        <p:nvSpPr>
+          <p:cNvPr id="12" name="Shape 9"/>
+          <p:cNvSpPr/>
+          <p:nvPr/>
+        </p:nvSpPr>
+        <p:spPr>
+          <a:xfrm>
+            <a:off x="7470851" y="91440"/>
+            <a:ext cx="27432" cy="274320"/>
+          </a:xfrm>
+          <a:prstGeom prst="rect">
+            <a:avLst/>
+          </a:prstGeom>
+          <a:solidFill>
+            <a:srgbClr val="B45309"/>
+          </a:solidFill>
+          <a:ln w="12700">
+            <a:solidFill>
+              <a:srgbClr val="B45309"/>
+            </a:solidFill>
+            <a:prstDash val="solid"/>
+          </a:ln>
+        </p:spPr>
+      </p:sp>
+      <p:pic>
+        <p:nvPicPr>
+          <p:cNvPr id="13" name="Image 1" descr="preencoded.png">    </p:cNvPr>
+          <p:cNvPicPr>
+            <a:picLocks noChangeAspect="1"/>
+          </p:cNvPicPr>
+          <p:nvPr/>
+        </p:nvPicPr>
+        <p:blipFill>
+          <a:blip r:embed="rId2"/>
+          <a:stretch>
+            <a:fillRect/>
+          </a:stretch>
+        </p:blipFill>
+        <p:spPr>
+          <a:xfrm>
+            <a:off x="7544003" y="128016"/>
+            <a:ext cx="201168" cy="201168"/>
+          </a:xfrm>
+          <a:prstGeom prst="rect">
+            <a:avLst/>
+          </a:prstGeom>
+        </p:spPr>
+      </p:pic>
+      <p:sp>
+        <p:nvSpPr>
+          <p:cNvPr id="14" name="Text 10"/>
+          <p:cNvSpPr txBox="1"/>
+          <p:nvPr/>
+        </p:nvSpPr>
+        <p:spPr>
+          <a:xfrm>
+            <a:off x="7800035" y="91440"/>
+            <a:ext cx="3806444" cy="274320"/>
+          </a:xfrm>
+          <a:prstGeom prst="rect">
+            <a:avLst/>
+          </a:prstGeom>
+          <a:noFill/>
+          <a:ln/>
+        </p:spPr>
+        <p:txBody>
+          <a:bodyPr wrap="square" lIns="0" tIns="0" rIns="0" bIns="0" rtlCol="0" anchor="ctr"/>
+          <a:lstStyle/>
+          <a:p>
+            <a:pPr indent="0" marL="0">
+              <a:buNone/>
+            </a:pPr>
+            <a:r>
+              <a:rPr lang="en-US" sz="1100" b="1" dirty="0">
+                <a:solidFill>
+                  <a:srgbClr val="92400E"/>
+                </a:solidFill>
+                <a:latin typeface="Calibri" pitchFamily="34" charset="0"/>
+                <a:ea typeface="Calibri" pitchFamily="34" charset="-122"/>
+                <a:cs typeface="Calibri" pitchFamily="34" charset="-120"/>
+              </a:rPr>
+              <a:t>DA UTILIZZARE OGGI</a:t>
+            </a:r>
+            <a:pPr indent="0" marL="0">
+              <a:buNone/>
+            </a:pPr>
+            <a:r>
+              <a:rPr lang="en-US" sz="1100" dirty="0">
+                <a:solidFill>
+                  <a:srgbClr val="92400E"/>
+                </a:solidFill>
+                <a:latin typeface="Calibri" pitchFamily="34" charset="0"/>
+                <a:ea typeface="Calibri" pitchFamily="34" charset="-122"/>
+                <a:cs typeface="Calibri" pitchFamily="34" charset="-120"/>
+              </a:rPr>
+              <a:t> · le chiamate del runtime PRG32</a:t>
+            </a:r>
+            <a:endParaRPr lang="en-US" sz="1100" dirty="0"/>
+          </a:p>
+        </p:txBody>
+      </p:sp>
+      <p:sp>
+        <p:nvSpPr>
+          <p:cNvPr id="15" name="Shape 11"/>
+          <p:cNvSpPr/>
+          <p:nvPr/>
+        </p:nvSpPr>
+        <p:spPr>
+          <a:xfrm>
+            <a:off x="3189554" y="91440"/>
+            <a:ext cx="4116705" cy="274320"/>
+          </a:xfrm>
+          <a:prstGeom prst="rect">
+            <a:avLst/>
+          </a:prstGeom>
+          <a:solidFill>
+            <a:srgbClr val="E0F2FE"/>
+          </a:solidFill>
+          <a:ln w="12700">
+            <a:solidFill>
+              <a:srgbClr val="0369A1"/>
+            </a:solidFill>
+            <a:prstDash val="solid"/>
+          </a:ln>
+        </p:spPr>
+      </p:sp>
+      <p:sp>
+        <p:nvSpPr>
+          <p:cNvPr id="16" name="Shape 12"/>
+          <p:cNvSpPr/>
+          <p:nvPr/>
+        </p:nvSpPr>
+        <p:spPr>
+          <a:xfrm>
+            <a:off x="3189554" y="91440"/>
+            <a:ext cx="73152" cy="274320"/>
+          </a:xfrm>
+          <a:prstGeom prst="rect">
+            <a:avLst/>
+          </a:prstGeom>
+          <a:solidFill>
+            <a:srgbClr val="0369A1"/>
+          </a:solidFill>
+          <a:ln w="12700">
+            <a:solidFill>
+              <a:srgbClr val="0369A1"/>
+            </a:solidFill>
+            <a:prstDash val="solid"/>
+          </a:ln>
+        </p:spPr>
+      </p:sp>
+      <p:pic>
+        <p:nvPicPr>
+          <p:cNvPr id="17" name="Image 2" descr="preencoded.png">    </p:cNvPr>
+          <p:cNvPicPr>
+            <a:picLocks noChangeAspect="1"/>
+          </p:cNvPicPr>
+          <p:nvPr/>
+        </p:nvPicPr>
+        <p:blipFill>
+          <a:blip r:embed="rId3"/>
+          <a:stretch>
+            <a:fillRect/>
+          </a:stretch>
+        </p:blipFill>
+        <p:spPr>
+          <a:xfrm>
+            <a:off x="3317570" y="128016"/>
+            <a:ext cx="201168" cy="201168"/>
+          </a:xfrm>
+          <a:prstGeom prst="rect">
+            <a:avLst/>
+          </a:prstGeom>
+        </p:spPr>
+      </p:pic>
+      <p:sp>
+        <p:nvSpPr>
+          <p:cNvPr id="18" name="Text 13"/>
+          <p:cNvSpPr txBox="1"/>
+          <p:nvPr/>
+        </p:nvSpPr>
+        <p:spPr>
+          <a:xfrm>
+            <a:off x="3573602" y="91440"/>
+            <a:ext cx="3696081" cy="274320"/>
+          </a:xfrm>
+          <a:prstGeom prst="rect">
+            <a:avLst/>
+          </a:prstGeom>
+          <a:noFill/>
+          <a:ln/>
+        </p:spPr>
+        <p:txBody>
+          <a:bodyPr wrap="square" lIns="0" tIns="0" rIns="0" bIns="0" rtlCol="0" anchor="ctr"/>
+          <a:lstStyle/>
+          <a:p>
+            <a:pPr indent="0" marL="0">
+              <a:buNone/>
+            </a:pPr>
+            <a:r>
+              <a:rPr lang="en-US" sz="1100" b="1" dirty="0">
+                <a:solidFill>
+                  <a:srgbClr val="075985"/>
+                </a:solidFill>
+                <a:latin typeface="Calibri" pitchFamily="34" charset="0"/>
+                <a:ea typeface="Calibri" pitchFamily="34" charset="-122"/>
+                <a:cs typeface="Calibri" pitchFamily="34" charset="-120"/>
+              </a:rPr>
+              <a:t>DA COMPRENDERE OGGI</a:t>
+            </a:r>
+            <a:pPr indent="0" marL="0">
+              <a:buNone/>
+            </a:pPr>
+            <a:r>
+              <a:rPr lang="en-US" sz="1100" dirty="0">
+                <a:solidFill>
+                  <a:srgbClr val="075985"/>
+                </a:solidFill>
+                <a:latin typeface="Calibri" pitchFamily="34" charset="0"/>
+                <a:ea typeface="Calibri" pitchFamily="34" charset="-122"/>
+                <a:cs typeface="Calibri" pitchFamily="34" charset="-120"/>
+              </a:rPr>
+              <a:t> · gli argomenti in a0 ... a7</a:t>
+            </a:r>
+            <a:endParaRPr lang="en-US" sz="1100" dirty="0"/>
+          </a:p>
+        </p:txBody>
+      </p:sp>
+      <p:sp>
+        <p:nvSpPr>
           <p:cNvPr id="25" name="Slide Number Placeholder 0"/>
           <p:cNvSpPr>
             <a:spLocks noGrp="1"/>
@@ -11963,6 +13734,133 @@
       </p:sp>
       <p:sp>
         <p:nvSpPr>
+          <p:cNvPr id="17" name="Shape 15"/>
+          <p:cNvSpPr/>
+          <p:nvPr/>
+        </p:nvSpPr>
+        <p:spPr>
+          <a:xfrm>
+            <a:off x="7263714" y="91440"/>
+            <a:ext cx="4379341" cy="274320"/>
+          </a:xfrm>
+          <a:prstGeom prst="rect">
+            <a:avLst/>
+          </a:prstGeom>
+          <a:solidFill>
+            <a:srgbClr val="E0F2FE"/>
+          </a:solidFill>
+          <a:ln w="12700">
+            <a:solidFill>
+              <a:srgbClr val="0369A1"/>
+            </a:solidFill>
+            <a:prstDash val="solid"/>
+          </a:ln>
+        </p:spPr>
+      </p:sp>
+      <p:sp>
+        <p:nvSpPr>
+          <p:cNvPr id="18" name="Shape 16"/>
+          <p:cNvSpPr/>
+          <p:nvPr/>
+        </p:nvSpPr>
+        <p:spPr>
+          <a:xfrm>
+            <a:off x="7263714" y="91440"/>
+            <a:ext cx="73152" cy="274320"/>
+          </a:xfrm>
+          <a:prstGeom prst="rect">
+            <a:avLst/>
+          </a:prstGeom>
+          <a:solidFill>
+            <a:srgbClr val="0369A1"/>
+          </a:solidFill>
+          <a:ln w="12700">
+            <a:solidFill>
+              <a:srgbClr val="0369A1"/>
+            </a:solidFill>
+            <a:prstDash val="solid"/>
+          </a:ln>
+        </p:spPr>
+      </p:sp>
+      <p:pic>
+        <p:nvPicPr>
+          <p:cNvPr id="19" name="Image 0" descr="preencoded.png">    </p:cNvPr>
+          <p:cNvPicPr>
+            <a:picLocks noChangeAspect="1"/>
+          </p:cNvPicPr>
+          <p:nvPr/>
+        </p:nvPicPr>
+        <p:blipFill>
+          <a:blip r:embed="rId1"/>
+          <a:stretch>
+            <a:fillRect/>
+          </a:stretch>
+        </p:blipFill>
+        <p:spPr>
+          <a:xfrm>
+            <a:off x="7391730" y="128016"/>
+            <a:ext cx="201168" cy="201168"/>
+          </a:xfrm>
+          <a:prstGeom prst="rect">
+            <a:avLst/>
+          </a:prstGeom>
+        </p:spPr>
+      </p:pic>
+      <p:sp>
+        <p:nvSpPr>
+          <p:cNvPr id="20" name="Text 17"/>
+          <p:cNvSpPr txBox="1"/>
+          <p:nvPr/>
+        </p:nvSpPr>
+        <p:spPr>
+          <a:xfrm>
+            <a:off x="7647762" y="91440"/>
+            <a:ext cx="3958717" cy="274320"/>
+          </a:xfrm>
+          <a:prstGeom prst="rect">
+            <a:avLst/>
+          </a:prstGeom>
+          <a:noFill/>
+          <a:ln/>
+        </p:spPr>
+        <p:txBody>
+          <a:bodyPr wrap="square" lIns="0" tIns="0" rIns="0" bIns="0" rtlCol="0" anchor="ctr"/>
+          <a:lstStyle/>
+          <a:p>
+            <a:pPr indent="0" marL="0">
+              <a:buNone/>
+            </a:pPr>
+            <a:r>
+              <a:rPr lang="en-US" sz="1100" b="1" dirty="0">
+                <a:solidFill>
+                  <a:srgbClr val="075985"/>
+                </a:solidFill>
+                <a:latin typeface="Calibri" pitchFamily="34" charset="0"/>
+                <a:ea typeface="Calibri" pitchFamily="34" charset="-122"/>
+                <a:cs typeface="Calibri" pitchFamily="34" charset="-120"/>
+              </a:rPr>
+              <a:t>DA COMPRENDERE OGGI</a:t>
+            </a:r>
+            <a:pPr indent="0" marL="0">
+              <a:buNone/>
+            </a:pPr>
+            <a:r>
+              <a:rPr lang="en-US" sz="1100" dirty="0">
+                <a:solidFill>
+                  <a:srgbClr val="075985"/>
+                </a:solidFill>
+                <a:latin typeface="Calibri" pitchFamily="34" charset="0"/>
+                <a:ea typeface="Calibri" pitchFamily="34" charset="-122"/>
+                <a:cs typeface="Calibri" pitchFamily="34" charset="-120"/>
+              </a:rPr>
+              <a:t> · indirizzo, valore, load, store</a:t>
+            </a:r>
+            <a:endParaRPr lang="en-US" sz="1100" dirty="0"/>
+          </a:p>
+        </p:txBody>
+      </p:sp>
+      <p:sp>
+        <p:nvSpPr>
           <p:cNvPr id="25" name="Slide Number Placeholder 0"/>
           <p:cNvSpPr>
             <a:spLocks noGrp="1"/>
@@ -12488,6 +14386,172 @@
       </p:sp>
       <p:sp>
         <p:nvSpPr>
+          <p:cNvPr id="10" name="Shape 7"/>
+          <p:cNvSpPr/>
+          <p:nvPr/>
+        </p:nvSpPr>
+        <p:spPr>
+          <a:xfrm>
+            <a:off x="7175703" y="91440"/>
+            <a:ext cx="4467352" cy="274320"/>
+          </a:xfrm>
+          <a:prstGeom prst="rect">
+            <a:avLst/>
+          </a:prstGeom>
+          <a:solidFill>
+            <a:srgbClr val="FEF3C7"/>
+          </a:solidFill>
+          <a:ln w="12700">
+            <a:solidFill>
+              <a:srgbClr val="B45309"/>
+            </a:solidFill>
+            <a:prstDash val="solid"/>
+          </a:ln>
+        </p:spPr>
+      </p:sp>
+      <p:sp>
+        <p:nvSpPr>
+          <p:cNvPr id="11" name="Shape 8"/>
+          <p:cNvSpPr/>
+          <p:nvPr/>
+        </p:nvSpPr>
+        <p:spPr>
+          <a:xfrm>
+            <a:off x="7175703" y="91440"/>
+            <a:ext cx="27432" cy="274320"/>
+          </a:xfrm>
+          <a:prstGeom prst="rect">
+            <a:avLst/>
+          </a:prstGeom>
+          <a:solidFill>
+            <a:srgbClr val="B45309"/>
+          </a:solidFill>
+          <a:ln w="12700">
+            <a:solidFill>
+              <a:srgbClr val="B45309"/>
+            </a:solidFill>
+            <a:prstDash val="solid"/>
+          </a:ln>
+        </p:spPr>
+      </p:sp>
+      <p:sp>
+        <p:nvSpPr>
+          <p:cNvPr id="12" name="Shape 9"/>
+          <p:cNvSpPr/>
+          <p:nvPr/>
+        </p:nvSpPr>
+        <p:spPr>
+          <a:xfrm>
+            <a:off x="7230567" y="91440"/>
+            <a:ext cx="27432" cy="274320"/>
+          </a:xfrm>
+          <a:prstGeom prst="rect">
+            <a:avLst/>
+          </a:prstGeom>
+          <a:solidFill>
+            <a:srgbClr val="B45309"/>
+          </a:solidFill>
+          <a:ln w="12700">
+            <a:solidFill>
+              <a:srgbClr val="B45309"/>
+            </a:solidFill>
+            <a:prstDash val="solid"/>
+          </a:ln>
+        </p:spPr>
+      </p:sp>
+      <p:pic>
+        <p:nvPicPr>
+          <p:cNvPr id="13" name="Image 1" descr="preencoded.png">    </p:cNvPr>
+          <p:cNvPicPr>
+            <a:picLocks noChangeAspect="1"/>
+          </p:cNvPicPr>
+          <p:nvPr/>
+        </p:nvPicPr>
+        <p:blipFill>
+          <a:blip r:embed="rId2"/>
+          <a:stretch>
+            <a:fillRect/>
+          </a:stretch>
+        </p:blipFill>
+        <p:spPr>
+          <a:xfrm>
+            <a:off x="7303719" y="128016"/>
+            <a:ext cx="201168" cy="201168"/>
+          </a:xfrm>
+          <a:prstGeom prst="rect">
+            <a:avLst/>
+          </a:prstGeom>
+        </p:spPr>
+      </p:pic>
+      <p:sp>
+        <p:nvSpPr>
+          <p:cNvPr id="14" name="Text 10"/>
+          <p:cNvSpPr txBox="1"/>
+          <p:nvPr/>
+        </p:nvSpPr>
+        <p:spPr>
+          <a:xfrm>
+            <a:off x="7559751" y="91440"/>
+            <a:ext cx="4046728" cy="274320"/>
+          </a:xfrm>
+          <a:prstGeom prst="rect">
+            <a:avLst/>
+          </a:prstGeom>
+          <a:noFill/>
+          <a:ln/>
+        </p:spPr>
+        <p:txBody>
+          <a:bodyPr wrap="square" lIns="0" tIns="0" rIns="0" bIns="0" rtlCol="0" anchor="ctr"/>
+          <a:lstStyle/>
+          <a:p>
+            <a:pPr indent="0" marL="0">
+              <a:buNone/>
+            </a:pPr>
+            <a:r>
+              <a:rPr lang="en-US" sz="1100" b="1" dirty="0">
+                <a:solidFill>
+                  <a:srgbClr val="92400E"/>
+                </a:solidFill>
+                <a:latin typeface="Calibri" pitchFamily="34" charset="0"/>
+                <a:ea typeface="Calibri" pitchFamily="34" charset="-122"/>
+                <a:cs typeface="Calibri" pitchFamily="34" charset="-120"/>
+              </a:rPr>
+              <a:t>DA UTILIZZARE OGGI</a:t>
+            </a:r>
+            <a:pPr indent="0" marL="0">
+              <a:buNone/>
+            </a:pPr>
+            <a:r>
+              <a:rPr lang="en-US" sz="1100" dirty="0">
+                <a:solidFill>
+                  <a:srgbClr val="92400E"/>
+                </a:solidFill>
+                <a:latin typeface="Calibri" pitchFamily="34" charset="0"/>
+                <a:ea typeface="Calibri" pitchFamily="34" charset="-122"/>
+                <a:cs typeface="Calibri" pitchFamily="34" charset="-120"/>
+              </a:rPr>
+              <a:t> · le maschere di bit</a:t>
+            </a:r>
+            <a:pPr indent="0" marL="0">
+              <a:buNone/>
+            </a:pPr>
+            <a:r>
+              <a:rPr lang="en-US" sz="1100" b="1" dirty="0">
+                <a:solidFill>
+                  <a:srgbClr val="92400E"/>
+                </a:solidFill>
+                <a:latin typeface="Calibri" pitchFamily="34" charset="0"/>
+                <a:ea typeface="Calibri" pitchFamily="34" charset="-122"/>
+                <a:cs typeface="Calibri" pitchFamily="34" charset="-120"/>
+              </a:rPr>
+              <a:t> → Lezione 08</a:t>
+            </a:r>
+            <a:endParaRPr lang="en-US" sz="1100" dirty="0"/>
+          </a:p>
+        </p:txBody>
+      </p:sp>
+      <p:sp>
+        <p:nvSpPr>
           <p:cNvPr id="25" name="Slide Number Placeholder 0"/>
           <p:cNvSpPr>
             <a:spLocks noGrp="1"/>
@@ -13005,6 +15069,158 @@
       </p:sp>
       <p:sp>
         <p:nvSpPr>
+          <p:cNvPr id="5" name="Shape 3"/>
+          <p:cNvSpPr/>
+          <p:nvPr/>
+        </p:nvSpPr>
+        <p:spPr>
+          <a:xfrm>
+            <a:off x="7941259" y="91440"/>
+            <a:ext cx="3701796" cy="274320"/>
+          </a:xfrm>
+          <a:prstGeom prst="rect">
+            <a:avLst/>
+          </a:prstGeom>
+          <a:solidFill>
+            <a:srgbClr val="FEF3C7"/>
+          </a:solidFill>
+          <a:ln w="12700">
+            <a:solidFill>
+              <a:srgbClr val="B45309"/>
+            </a:solidFill>
+            <a:prstDash val="solid"/>
+          </a:ln>
+        </p:spPr>
+      </p:sp>
+      <p:sp>
+        <p:nvSpPr>
+          <p:cNvPr id="6" name="Shape 4"/>
+          <p:cNvSpPr/>
+          <p:nvPr/>
+        </p:nvSpPr>
+        <p:spPr>
+          <a:xfrm>
+            <a:off x="7941259" y="91440"/>
+            <a:ext cx="27432" cy="274320"/>
+          </a:xfrm>
+          <a:prstGeom prst="rect">
+            <a:avLst/>
+          </a:prstGeom>
+          <a:solidFill>
+            <a:srgbClr val="B45309"/>
+          </a:solidFill>
+          <a:ln w="12700">
+            <a:solidFill>
+              <a:srgbClr val="B45309"/>
+            </a:solidFill>
+            <a:prstDash val="solid"/>
+          </a:ln>
+        </p:spPr>
+      </p:sp>
+      <p:sp>
+        <p:nvSpPr>
+          <p:cNvPr id="7" name="Shape 5"/>
+          <p:cNvSpPr/>
+          <p:nvPr/>
+        </p:nvSpPr>
+        <p:spPr>
+          <a:xfrm>
+            <a:off x="7996123" y="91440"/>
+            <a:ext cx="27432" cy="274320"/>
+          </a:xfrm>
+          <a:prstGeom prst="rect">
+            <a:avLst/>
+          </a:prstGeom>
+          <a:solidFill>
+            <a:srgbClr val="B45309"/>
+          </a:solidFill>
+          <a:ln w="12700">
+            <a:solidFill>
+              <a:srgbClr val="B45309"/>
+            </a:solidFill>
+            <a:prstDash val="solid"/>
+          </a:ln>
+        </p:spPr>
+      </p:sp>
+      <p:pic>
+        <p:nvPicPr>
+          <p:cNvPr id="8" name="Image 0" descr="preencoded.png">    </p:cNvPr>
+          <p:cNvPicPr>
+            <a:picLocks noChangeAspect="1"/>
+          </p:cNvPicPr>
+          <p:nvPr/>
+        </p:nvPicPr>
+        <p:blipFill>
+          <a:blip r:embed="rId1"/>
+          <a:stretch>
+            <a:fillRect/>
+          </a:stretch>
+        </p:blipFill>
+        <p:spPr>
+          <a:xfrm>
+            <a:off x="8069275" y="128016"/>
+            <a:ext cx="201168" cy="201168"/>
+          </a:xfrm>
+          <a:prstGeom prst="rect">
+            <a:avLst/>
+          </a:prstGeom>
+        </p:spPr>
+      </p:pic>
+      <p:sp>
+        <p:nvSpPr>
+          <p:cNvPr id="9" name="Text 6"/>
+          <p:cNvSpPr txBox="1"/>
+          <p:nvPr/>
+        </p:nvSpPr>
+        <p:spPr>
+          <a:xfrm>
+            <a:off x="8325307" y="91440"/>
+            <a:ext cx="3281172" cy="274320"/>
+          </a:xfrm>
+          <a:prstGeom prst="rect">
+            <a:avLst/>
+          </a:prstGeom>
+          <a:noFill/>
+          <a:ln/>
+        </p:spPr>
+        <p:txBody>
+          <a:bodyPr wrap="square" lIns="0" tIns="0" rIns="0" bIns="0" rtlCol="0" anchor="ctr"/>
+          <a:lstStyle/>
+          <a:p>
+            <a:pPr indent="0" marL="0">
+              <a:buNone/>
+            </a:pPr>
+            <a:r>
+              <a:rPr lang="en-US" sz="1100" b="1" dirty="0">
+                <a:solidFill>
+                  <a:srgbClr val="92400E"/>
+                </a:solidFill>
+                <a:latin typeface="Calibri" pitchFamily="34" charset="0"/>
+                <a:ea typeface="Calibri" pitchFamily="34" charset="-122"/>
+                <a:cs typeface="Calibri" pitchFamily="34" charset="-120"/>
+              </a:rPr>
+              <a:t>DA UTILIZZARE OGGI</a:t>
+            </a:r>
+            <a:pPr indent="0" marL="0">
+              <a:buNone/>
+            </a:pPr>
+            <a:r>
+              <a:rPr lang="en-US" sz="1100" dirty="0">
+                <a:solidFill>
+                  <a:srgbClr val="92400E"/>
+                </a:solidFill>
+                <a:latin typeface="Calibri" pitchFamily="34" charset="0"/>
+                <a:ea typeface="Calibri" pitchFamily="34" charset="-122"/>
+                <a:cs typeface="Calibri" pitchFamily="34" charset="-120"/>
+              </a:rPr>
+              <a:t> · il programma completo</a:t>
+            </a:r>
+            <a:endParaRPr lang="en-US" sz="1100" dirty="0"/>
+          </a:p>
+        </p:txBody>
+      </p:sp>
+      <p:sp>
+        <p:nvSpPr>
           <p:cNvPr id="25" name="Slide Number Placeholder 0"/>
           <p:cNvSpPr>
             <a:spLocks noGrp="1"/>
@@ -13682,6 +15898,158 @@
               <a:t>    call prg32_gfx_text8</a:t>
             </a:r>
             <a:endParaRPr lang="en-US" sz="1500" dirty="0"/>
+          </a:p>
+        </p:txBody>
+      </p:sp>
+      <p:sp>
+        <p:nvSpPr>
+          <p:cNvPr id="5" name="Shape 3"/>
+          <p:cNvSpPr/>
+          <p:nvPr/>
+        </p:nvSpPr>
+        <p:spPr>
+          <a:xfrm>
+            <a:off x="7941259" y="91440"/>
+            <a:ext cx="3701796" cy="274320"/>
+          </a:xfrm>
+          <a:prstGeom prst="rect">
+            <a:avLst/>
+          </a:prstGeom>
+          <a:solidFill>
+            <a:srgbClr val="FEF3C7"/>
+          </a:solidFill>
+          <a:ln w="12700">
+            <a:solidFill>
+              <a:srgbClr val="B45309"/>
+            </a:solidFill>
+            <a:prstDash val="solid"/>
+          </a:ln>
+        </p:spPr>
+      </p:sp>
+      <p:sp>
+        <p:nvSpPr>
+          <p:cNvPr id="6" name="Shape 4"/>
+          <p:cNvSpPr/>
+          <p:nvPr/>
+        </p:nvSpPr>
+        <p:spPr>
+          <a:xfrm>
+            <a:off x="7941259" y="91440"/>
+            <a:ext cx="27432" cy="274320"/>
+          </a:xfrm>
+          <a:prstGeom prst="rect">
+            <a:avLst/>
+          </a:prstGeom>
+          <a:solidFill>
+            <a:srgbClr val="B45309"/>
+          </a:solidFill>
+          <a:ln w="12700">
+            <a:solidFill>
+              <a:srgbClr val="B45309"/>
+            </a:solidFill>
+            <a:prstDash val="solid"/>
+          </a:ln>
+        </p:spPr>
+      </p:sp>
+      <p:sp>
+        <p:nvSpPr>
+          <p:cNvPr id="7" name="Shape 5"/>
+          <p:cNvSpPr/>
+          <p:nvPr/>
+        </p:nvSpPr>
+        <p:spPr>
+          <a:xfrm>
+            <a:off x="7996123" y="91440"/>
+            <a:ext cx="27432" cy="274320"/>
+          </a:xfrm>
+          <a:prstGeom prst="rect">
+            <a:avLst/>
+          </a:prstGeom>
+          <a:solidFill>
+            <a:srgbClr val="B45309"/>
+          </a:solidFill>
+          <a:ln w="12700">
+            <a:solidFill>
+              <a:srgbClr val="B45309"/>
+            </a:solidFill>
+            <a:prstDash val="solid"/>
+          </a:ln>
+        </p:spPr>
+      </p:sp>
+      <p:pic>
+        <p:nvPicPr>
+          <p:cNvPr id="8" name="Image 0" descr="preencoded.png">    </p:cNvPr>
+          <p:cNvPicPr>
+            <a:picLocks noChangeAspect="1"/>
+          </p:cNvPicPr>
+          <p:nvPr/>
+        </p:nvPicPr>
+        <p:blipFill>
+          <a:blip r:embed="rId1"/>
+          <a:stretch>
+            <a:fillRect/>
+          </a:stretch>
+        </p:blipFill>
+        <p:spPr>
+          <a:xfrm>
+            <a:off x="8069275" y="128016"/>
+            <a:ext cx="201168" cy="201168"/>
+          </a:xfrm>
+          <a:prstGeom prst="rect">
+            <a:avLst/>
+          </a:prstGeom>
+        </p:spPr>
+      </p:pic>
+      <p:sp>
+        <p:nvSpPr>
+          <p:cNvPr id="9" name="Text 6"/>
+          <p:cNvSpPr txBox="1"/>
+          <p:nvPr/>
+        </p:nvSpPr>
+        <p:spPr>
+          <a:xfrm>
+            <a:off x="8325307" y="91440"/>
+            <a:ext cx="3281172" cy="274320"/>
+          </a:xfrm>
+          <a:prstGeom prst="rect">
+            <a:avLst/>
+          </a:prstGeom>
+          <a:noFill/>
+          <a:ln/>
+        </p:spPr>
+        <p:txBody>
+          <a:bodyPr wrap="square" lIns="0" tIns="0" rIns="0" bIns="0" rtlCol="0" anchor="ctr"/>
+          <a:lstStyle/>
+          <a:p>
+            <a:pPr indent="0" marL="0">
+              <a:buNone/>
+            </a:pPr>
+            <a:r>
+              <a:rPr lang="en-US" sz="1100" b="1" dirty="0">
+                <a:solidFill>
+                  <a:srgbClr val="92400E"/>
+                </a:solidFill>
+                <a:latin typeface="Calibri" pitchFamily="34" charset="0"/>
+                <a:ea typeface="Calibri" pitchFamily="34" charset="-122"/>
+                <a:cs typeface="Calibri" pitchFamily="34" charset="-120"/>
+              </a:rPr>
+              <a:t>DA UTILIZZARE OGGI</a:t>
+            </a:r>
+            <a:pPr indent="0" marL="0">
+              <a:buNone/>
+            </a:pPr>
+            <a:r>
+              <a:rPr lang="en-US" sz="1100" dirty="0">
+                <a:solidFill>
+                  <a:srgbClr val="92400E"/>
+                </a:solidFill>
+                <a:latin typeface="Calibri" pitchFamily="34" charset="0"/>
+                <a:ea typeface="Calibri" pitchFamily="34" charset="-122"/>
+                <a:cs typeface="Calibri" pitchFamily="34" charset="-120"/>
+              </a:rPr>
+              <a:t> · il programma completo</a:t>
+            </a:r>
+            <a:endParaRPr lang="en-US" sz="1100" dirty="0"/>
           </a:p>
         </p:txBody>
       </p:sp>

--- a/it/slides/02-Architettura_dei_Calcolatori-Primo_Contatto_con_Assembly_RISC-V-Codice.pptx
+++ b/it/slides/02-Architettura_dei_Calcolatori-Primo_Contatto_con_Assembly_RISC-V-Codice.pptx
@@ -122,13 +122,13 @@
   <p:extLst>
     <p:ext uri="{521415D9-36F7-43E2-AB2F-B90AF26B5E84}">
       <p14:sectionLst xmlns:p14="http://schemas.microsoft.com/office/powerpoint/2010/main">
-        <p14:section name="Apertura" id="{05a629b6-7339-85e6-7cb3-7b200b57ecdb}">
+        <p14:section name="Apertura" id="{8d7d5935-5ea7-1acd-d3ce-cb324107703c}">
           <p14:sldIdLst>
             <p14:sldId id="256"/>
             <p14:sldId id="257"/>
           </p14:sldIdLst>
         </p14:section>
-        <p14:section name="La prima cartuccia" id="{42a2d9e4-e0e8-91f9-1dbf-de7c2efc43dd}">
+        <p14:section name="La prima cartuccia" id="{d007d65b-db64-b12e-ee7e-60d55a943b10}">
           <p14:sldIdLst>
             <p14:sldId id="258"/>
             <p14:sldId id="259"/>
@@ -137,14 +137,14 @@
             <p14:sldId id="262"/>
           </p14:sldIdLst>
         </p14:section>
-        <p14:section name="Il programma completo" id="{d1d6af84-6516-1460-9259-88a3e8af5f11}">
+        <p14:section name="Il programma completo" id="{eb776692-8f46-0d6e-73d9-2c3c8a38f289}">
           <p14:sldIdLst>
             <p14:sldId id="263"/>
             <p14:sldId id="264"/>
             <p14:sldId id="265"/>
           </p14:sldIdLst>
         </p14:section>
-        <p14:section name="Eseguire e provare" id="{ddfc94a0-259b-885d-ad52-7efbeccd3342}">
+        <p14:section name="Eseguire e provare" id="{9f8dd0f6-438f-92b4-32eb-d42a424c7c1d}">
           <p14:sldIdLst>
             <p14:sldId id="266"/>
             <p14:sldId id="267"/>
@@ -153,7 +153,7 @@
             <p14:sldId id="270"/>
           </p14:sldIdLst>
         </p14:section>
-        <p14:section name="Esercizi" id="{ef0e9a5d-bf93-7c1e-2f4c-90ab24f3dadf}">
+        <p14:section name="Esercizi" id="{225e09e5-bd6e-8950-dd71-d1bb81c3638c}">
           <p14:sldIdLst>
             <p14:sldId id="271"/>
           </p14:sldIdLst>
